--- a/GerMan_Präsi.pptx
+++ b/GerMan_Präsi.pptx
@@ -373,7 +373,7 @@
             <a:pPr indent="0" algn="r">
               <a:buNone/>
             </a:pPr>
-            <a:fld id="{9E80BCCF-3CCA-43E2-ACA0-8E1839AA9296}" type="slidenum">
+            <a:fld id="{98BA475F-695B-494C-BE0D-9DA66A5AF787}" type="slidenum">
               <a:rPr lang="de-DE" sz="1400" b="0" u="none" strike="noStrike">
                 <a:solidFill>
                   <a:srgbClr val="000000"/>
@@ -420,7 +420,7 @@
       </p:grpSpPr>
       <p:sp>
         <p:nvSpPr>
-          <p:cNvPr id="124" name="PlaceHolder 1"/>
+          <p:cNvPr id="128" name="PlaceHolder 1"/>
           <p:cNvSpPr>
             <a:spLocks noGrp="1"/>
           </p:cNvSpPr>
@@ -443,7 +443,7 @@
       </p:sp>
       <p:sp>
         <p:nvSpPr>
-          <p:cNvPr id="125" name="PlaceHolder 2"/>
+          <p:cNvPr id="129" name="PlaceHolder 2"/>
           <p:cNvSpPr>
             <a:spLocks noGrp="1"/>
           </p:cNvSpPr>
@@ -499,7 +499,7 @@
       </p:sp>
       <p:sp>
         <p:nvSpPr>
-          <p:cNvPr id="126" name="PlaceHolder 3"/>
+          <p:cNvPr id="130" name="PlaceHolder 3"/>
           <p:cNvSpPr>
             <a:spLocks noGrp="1"/>
           </p:cNvSpPr>
@@ -548,7 +548,7 @@
               </a:lnSpc>
               <a:buNone/>
             </a:pPr>
-            <a:fld id="{93C409A2-35CE-42AA-B6C4-F956B87798C8}" type="slidenum">
+            <a:fld id="{3AC4C0C9-E42C-4E79-9A7C-F5EBCFECCF42}" type="slidenum">
               <a:rPr lang="en-US" sz="1200" b="0" u="none" strike="noStrike">
                 <a:solidFill>
                   <a:schemeClr val="dk1"/>
@@ -595,7 +595,7 @@
       </p:grpSpPr>
       <p:sp>
         <p:nvSpPr>
-          <p:cNvPr id="151" name="PlaceHolder 1"/>
+          <p:cNvPr id="155" name="PlaceHolder 1"/>
           <p:cNvSpPr>
             <a:spLocks noGrp="1"/>
           </p:cNvSpPr>
@@ -618,7 +618,7 @@
       </p:sp>
       <p:sp>
         <p:nvSpPr>
-          <p:cNvPr id="152" name="PlaceHolder 2"/>
+          <p:cNvPr id="156" name="PlaceHolder 2"/>
           <p:cNvSpPr>
             <a:spLocks noGrp="1"/>
           </p:cNvSpPr>
@@ -674,7 +674,7 @@
       </p:sp>
       <p:sp>
         <p:nvSpPr>
-          <p:cNvPr id="153" name="PlaceHolder 3"/>
+          <p:cNvPr id="157" name="PlaceHolder 3"/>
           <p:cNvSpPr>
             <a:spLocks noGrp="1"/>
           </p:cNvSpPr>
@@ -723,7 +723,7 @@
               </a:lnSpc>
               <a:buNone/>
             </a:pPr>
-            <a:fld id="{9CA1682C-FAFC-43E8-8285-C507EE3A9704}" type="slidenum">
+            <a:fld id="{182BB209-0413-4095-A467-1E64B6B82A18}" type="slidenum">
               <a:rPr lang="en-US" sz="1200" b="0" u="none" strike="noStrike">
                 <a:solidFill>
                   <a:schemeClr val="dk1"/>
@@ -770,7 +770,7 @@
       </p:grpSpPr>
       <p:sp>
         <p:nvSpPr>
-          <p:cNvPr id="127" name="PlaceHolder 1"/>
+          <p:cNvPr id="131" name="PlaceHolder 1"/>
           <p:cNvSpPr>
             <a:spLocks noGrp="1"/>
           </p:cNvSpPr>
@@ -793,7 +793,7 @@
       </p:sp>
       <p:sp>
         <p:nvSpPr>
-          <p:cNvPr id="128" name="PlaceHolder 2"/>
+          <p:cNvPr id="132" name="PlaceHolder 2"/>
           <p:cNvSpPr>
             <a:spLocks noGrp="1"/>
           </p:cNvSpPr>
@@ -849,7 +849,7 @@
       </p:sp>
       <p:sp>
         <p:nvSpPr>
-          <p:cNvPr id="129" name="PlaceHolder 3"/>
+          <p:cNvPr id="133" name="PlaceHolder 3"/>
           <p:cNvSpPr>
             <a:spLocks noGrp="1"/>
           </p:cNvSpPr>
@@ -898,7 +898,7 @@
               </a:lnSpc>
               <a:buNone/>
             </a:pPr>
-            <a:fld id="{043E15AF-AEE6-4D4A-A0C8-40305DF84F6B}" type="slidenum">
+            <a:fld id="{F4D4F4F5-C281-4226-90C8-82BEEDB2CB11}" type="slidenum">
               <a:rPr lang="en-US" sz="1200" b="0" u="none" strike="noStrike">
                 <a:solidFill>
                   <a:schemeClr val="dk1"/>
@@ -945,7 +945,7 @@
       </p:grpSpPr>
       <p:sp>
         <p:nvSpPr>
-          <p:cNvPr id="130" name="PlaceHolder 1"/>
+          <p:cNvPr id="134" name="PlaceHolder 1"/>
           <p:cNvSpPr>
             <a:spLocks noGrp="1"/>
           </p:cNvSpPr>
@@ -968,7 +968,7 @@
       </p:sp>
       <p:sp>
         <p:nvSpPr>
-          <p:cNvPr id="131" name="PlaceHolder 2"/>
+          <p:cNvPr id="135" name="PlaceHolder 2"/>
           <p:cNvSpPr>
             <a:spLocks noGrp="1"/>
           </p:cNvSpPr>
@@ -1024,7 +1024,7 @@
       </p:sp>
       <p:sp>
         <p:nvSpPr>
-          <p:cNvPr id="132" name="PlaceHolder 3"/>
+          <p:cNvPr id="136" name="PlaceHolder 3"/>
           <p:cNvSpPr>
             <a:spLocks noGrp="1"/>
           </p:cNvSpPr>
@@ -1073,7 +1073,7 @@
               </a:lnSpc>
               <a:buNone/>
             </a:pPr>
-            <a:fld id="{6656C28F-2B82-4762-A620-8282F789638B}" type="slidenum">
+            <a:fld id="{B96BC5E5-DDFE-4BC0-B38F-92AB07E8C3F5}" type="slidenum">
               <a:rPr lang="en-US" sz="1200" b="0" u="none" strike="noStrike">
                 <a:solidFill>
                   <a:schemeClr val="dk1"/>
@@ -1120,7 +1120,7 @@
       </p:grpSpPr>
       <p:sp>
         <p:nvSpPr>
-          <p:cNvPr id="133" name="PlaceHolder 1"/>
+          <p:cNvPr id="137" name="PlaceHolder 1"/>
           <p:cNvSpPr>
             <a:spLocks noGrp="1"/>
           </p:cNvSpPr>
@@ -1143,7 +1143,7 @@
       </p:sp>
       <p:sp>
         <p:nvSpPr>
-          <p:cNvPr id="134" name="PlaceHolder 2"/>
+          <p:cNvPr id="138" name="PlaceHolder 2"/>
           <p:cNvSpPr>
             <a:spLocks noGrp="1"/>
           </p:cNvSpPr>
@@ -1199,7 +1199,7 @@
       </p:sp>
       <p:sp>
         <p:nvSpPr>
-          <p:cNvPr id="135" name="PlaceHolder 3"/>
+          <p:cNvPr id="139" name="PlaceHolder 3"/>
           <p:cNvSpPr>
             <a:spLocks noGrp="1"/>
           </p:cNvSpPr>
@@ -1248,7 +1248,7 @@
               </a:lnSpc>
               <a:buNone/>
             </a:pPr>
-            <a:fld id="{A1D786BB-8A1B-425A-A0FF-FC778E040903}" type="slidenum">
+            <a:fld id="{7831961F-0F85-425A-97EE-8746C500D18F}" type="slidenum">
               <a:rPr lang="en-US" sz="1200" b="0" u="none" strike="noStrike">
                 <a:solidFill>
                   <a:schemeClr val="dk1"/>
@@ -1295,7 +1295,7 @@
       </p:grpSpPr>
       <p:sp>
         <p:nvSpPr>
-          <p:cNvPr id="136" name="PlaceHolder 1"/>
+          <p:cNvPr id="140" name="PlaceHolder 1"/>
           <p:cNvSpPr>
             <a:spLocks noGrp="1"/>
           </p:cNvSpPr>
@@ -1318,7 +1318,7 @@
       </p:sp>
       <p:sp>
         <p:nvSpPr>
-          <p:cNvPr id="137" name="PlaceHolder 2"/>
+          <p:cNvPr id="141" name="PlaceHolder 2"/>
           <p:cNvSpPr>
             <a:spLocks noGrp="1"/>
           </p:cNvSpPr>
@@ -1374,7 +1374,7 @@
       </p:sp>
       <p:sp>
         <p:nvSpPr>
-          <p:cNvPr id="138" name="PlaceHolder 3"/>
+          <p:cNvPr id="142" name="PlaceHolder 3"/>
           <p:cNvSpPr>
             <a:spLocks noGrp="1"/>
           </p:cNvSpPr>
@@ -1423,7 +1423,7 @@
               </a:lnSpc>
               <a:buNone/>
             </a:pPr>
-            <a:fld id="{35F8F6BC-A16F-4E9A-98FB-807CDDCF30D3}" type="slidenum">
+            <a:fld id="{191257BA-1D1F-4AD2-8307-243F6DF8EA87}" type="slidenum">
               <a:rPr lang="en-US" sz="1200" b="0" u="none" strike="noStrike">
                 <a:solidFill>
                   <a:schemeClr val="dk1"/>
@@ -1470,7 +1470,7 @@
       </p:grpSpPr>
       <p:sp>
         <p:nvSpPr>
-          <p:cNvPr id="139" name="PlaceHolder 1"/>
+          <p:cNvPr id="143" name="PlaceHolder 1"/>
           <p:cNvSpPr>
             <a:spLocks noGrp="1"/>
           </p:cNvSpPr>
@@ -1493,7 +1493,7 @@
       </p:sp>
       <p:sp>
         <p:nvSpPr>
-          <p:cNvPr id="140" name="PlaceHolder 2"/>
+          <p:cNvPr id="144" name="PlaceHolder 2"/>
           <p:cNvSpPr>
             <a:spLocks noGrp="1"/>
           </p:cNvSpPr>
@@ -1549,7 +1549,7 @@
       </p:sp>
       <p:sp>
         <p:nvSpPr>
-          <p:cNvPr id="141" name="PlaceHolder 3"/>
+          <p:cNvPr id="145" name="PlaceHolder 3"/>
           <p:cNvSpPr>
             <a:spLocks noGrp="1"/>
           </p:cNvSpPr>
@@ -1598,7 +1598,7 @@
               </a:lnSpc>
               <a:buNone/>
             </a:pPr>
-            <a:fld id="{9CEC6D4A-D386-46FE-AA56-EE401609C90A}" type="slidenum">
+            <a:fld id="{1BB5503A-E681-4EBC-863C-7842543DB34F}" type="slidenum">
               <a:rPr lang="en-US" sz="1200" b="0" u="none" strike="noStrike">
                 <a:solidFill>
                   <a:schemeClr val="dk1"/>
@@ -1645,7 +1645,7 @@
       </p:grpSpPr>
       <p:sp>
         <p:nvSpPr>
-          <p:cNvPr id="142" name="PlaceHolder 1"/>
+          <p:cNvPr id="146" name="PlaceHolder 1"/>
           <p:cNvSpPr>
             <a:spLocks noGrp="1"/>
           </p:cNvSpPr>
@@ -1668,7 +1668,7 @@
       </p:sp>
       <p:sp>
         <p:nvSpPr>
-          <p:cNvPr id="143" name="PlaceHolder 2"/>
+          <p:cNvPr id="147" name="PlaceHolder 2"/>
           <p:cNvSpPr>
             <a:spLocks noGrp="1"/>
           </p:cNvSpPr>
@@ -1724,7 +1724,7 @@
       </p:sp>
       <p:sp>
         <p:nvSpPr>
-          <p:cNvPr id="144" name="PlaceHolder 3"/>
+          <p:cNvPr id="148" name="PlaceHolder 3"/>
           <p:cNvSpPr>
             <a:spLocks noGrp="1"/>
           </p:cNvSpPr>
@@ -1773,7 +1773,7 @@
               </a:lnSpc>
               <a:buNone/>
             </a:pPr>
-            <a:fld id="{7DB3FDAC-D607-40B1-821B-4D3924B0CC38}" type="slidenum">
+            <a:fld id="{74841851-690E-4F84-BA90-77FF8A8AD364}" type="slidenum">
               <a:rPr lang="en-US" sz="1200" b="0" u="none" strike="noStrike">
                 <a:solidFill>
                   <a:schemeClr val="dk1"/>
@@ -1820,7 +1820,7 @@
       </p:grpSpPr>
       <p:sp>
         <p:nvSpPr>
-          <p:cNvPr id="145" name="PlaceHolder 1"/>
+          <p:cNvPr id="149" name="PlaceHolder 1"/>
           <p:cNvSpPr>
             <a:spLocks noGrp="1"/>
           </p:cNvSpPr>
@@ -1843,7 +1843,7 @@
       </p:sp>
       <p:sp>
         <p:nvSpPr>
-          <p:cNvPr id="146" name="PlaceHolder 2"/>
+          <p:cNvPr id="150" name="PlaceHolder 2"/>
           <p:cNvSpPr>
             <a:spLocks noGrp="1"/>
           </p:cNvSpPr>
@@ -1899,7 +1899,7 @@
       </p:sp>
       <p:sp>
         <p:nvSpPr>
-          <p:cNvPr id="147" name="PlaceHolder 3"/>
+          <p:cNvPr id="151" name="PlaceHolder 3"/>
           <p:cNvSpPr>
             <a:spLocks noGrp="1"/>
           </p:cNvSpPr>
@@ -1948,7 +1948,7 @@
               </a:lnSpc>
               <a:buNone/>
             </a:pPr>
-            <a:fld id="{B002899D-B6EC-4AE1-85F2-160526F77838}" type="slidenum">
+            <a:fld id="{DAF1085C-DE86-4E88-A543-C0B69C221165}" type="slidenum">
               <a:rPr lang="en-US" sz="1200" b="0" u="none" strike="noStrike">
                 <a:solidFill>
                   <a:schemeClr val="dk1"/>
@@ -1995,7 +1995,7 @@
       </p:grpSpPr>
       <p:sp>
         <p:nvSpPr>
-          <p:cNvPr id="148" name="PlaceHolder 1"/>
+          <p:cNvPr id="152" name="PlaceHolder 1"/>
           <p:cNvSpPr>
             <a:spLocks noGrp="1"/>
           </p:cNvSpPr>
@@ -2018,7 +2018,7 @@
       </p:sp>
       <p:sp>
         <p:nvSpPr>
-          <p:cNvPr id="149" name="PlaceHolder 2"/>
+          <p:cNvPr id="153" name="PlaceHolder 2"/>
           <p:cNvSpPr>
             <a:spLocks noGrp="1"/>
           </p:cNvSpPr>
@@ -2074,7 +2074,7 @@
       </p:sp>
       <p:sp>
         <p:nvSpPr>
-          <p:cNvPr id="150" name="PlaceHolder 3"/>
+          <p:cNvPr id="154" name="PlaceHolder 3"/>
           <p:cNvSpPr>
             <a:spLocks noGrp="1"/>
           </p:cNvSpPr>
@@ -2123,7 +2123,7 @@
               </a:lnSpc>
               <a:buNone/>
             </a:pPr>
-            <a:fld id="{402C90C6-35AB-4295-A77D-B7A9F92231D8}" type="slidenum">
+            <a:fld id="{D2DAC31B-2C25-4158-8054-E37FE613EEC0}" type="slidenum">
               <a:rPr lang="en-US" sz="1200" b="0" u="none" strike="noStrike">
                 <a:solidFill>
                   <a:schemeClr val="dk1"/>
@@ -2895,7 +2895,7 @@
       </p:grpSpPr>
       <p:sp>
         <p:nvSpPr>
-          <p:cNvPr id="119" name="Text 0"/>
+          <p:cNvPr id="123" name="Text 0"/>
           <p:cNvSpPr/>
           <p:nvPr/>
         </p:nvSpPr>
@@ -2956,7 +2956,7 @@
       </p:sp>
       <p:sp>
         <p:nvSpPr>
-          <p:cNvPr id="120" name="Shape 1"/>
+          <p:cNvPr id="124" name="Shape 1"/>
           <p:cNvSpPr/>
           <p:nvPr/>
         </p:nvSpPr>
@@ -2999,7 +2999,7 @@
       </p:sp>
       <p:sp>
         <p:nvSpPr>
-          <p:cNvPr id="121" name="Text 2"/>
+          <p:cNvPr id="125" name="Text 2"/>
           <p:cNvSpPr/>
           <p:nvPr/>
         </p:nvSpPr>
@@ -3060,7 +3060,7 @@
       </p:sp>
       <p:sp>
         <p:nvSpPr>
-          <p:cNvPr id="122" name="Text 3"/>
+          <p:cNvPr id="126" name="Text 3"/>
           <p:cNvSpPr/>
           <p:nvPr/>
         </p:nvSpPr>
@@ -3121,7 +3121,7 @@
       </p:sp>
       <p:sp>
         <p:nvSpPr>
-          <p:cNvPr id="123" name="Text 5"/>
+          <p:cNvPr id="127" name="Text 5"/>
           <p:cNvSpPr/>
           <p:nvPr/>
         </p:nvSpPr>
@@ -4012,9 +4012,33 @@
           <a:chExt cx="0" cy="0"/>
         </a:xfrm>
       </p:grpSpPr>
-      <p:sp>
-        <p:nvSpPr>
-          <p:cNvPr id="29" name="Text 0"/>
+      <p:pic>
+        <p:nvPicPr>
+          <p:cNvPr id="29" name=""/>
+          <p:cNvPicPr/>
+          <p:nvPr/>
+        </p:nvPicPr>
+        <p:blipFill>
+          <a:blip r:embed="rId1"/>
+          <a:stretch/>
+        </p:blipFill>
+        <p:spPr>
+          <a:xfrm>
+            <a:off x="180000" y="1260000"/>
+            <a:ext cx="8820000" cy="3251160"/>
+          </a:xfrm>
+          <a:prstGeom prst="rect">
+            <a:avLst/>
+          </a:prstGeom>
+          <a:noFill/>
+          <a:ln w="0">
+            <a:noFill/>
+          </a:ln>
+        </p:spPr>
+      </p:pic>
+      <p:sp>
+        <p:nvSpPr>
+          <p:cNvPr id="30" name="Text 0"/>
           <p:cNvSpPr/>
           <p:nvPr/>
         </p:nvSpPr>
@@ -4075,7 +4099,7 @@
       </p:sp>
       <p:sp>
         <p:nvSpPr>
-          <p:cNvPr id="30" name="Shape 1"/>
+          <p:cNvPr id="31" name="Shape 1"/>
           <p:cNvSpPr/>
           <p:nvPr/>
         </p:nvSpPr>
@@ -4116,20 +4140,16 @@
           </a:p>
         </p:txBody>
       </p:sp>
-      <p:pic>
-        <p:nvPicPr>
-          <p:cNvPr id="31" name=""/>
-          <p:cNvPicPr/>
-          <p:nvPr/>
-        </p:nvPicPr>
-        <p:blipFill>
-          <a:blip r:embed="rId1"/>
-          <a:stretch/>
-        </p:blipFill>
-        <p:spPr>
-          <a:xfrm>
-            <a:off x="180000" y="1260000"/>
-            <a:ext cx="8820000" cy="3251160"/>
+      <p:sp>
+        <p:nvSpPr>
+          <p:cNvPr id="32" name=""/>
+          <p:cNvSpPr txBox="1"/>
+          <p:nvPr/>
+        </p:nvSpPr>
+        <p:spPr>
+          <a:xfrm>
+            <a:off x="5760000" y="3240000"/>
+            <a:ext cx="180000" cy="401400"/>
           </a:xfrm>
           <a:prstGeom prst="rect">
             <a:avLst/>
@@ -4139,7 +4159,171 @@
             <a:noFill/>
           </a:ln>
         </p:spPr>
-      </p:pic>
+        <p:txBody>
+          <a:bodyPr lIns="90000" rIns="90000" tIns="45000" bIns="45000" anchor="t">
+            <a:spAutoFit/>
+          </a:bodyPr>
+          <a:p>
+            <a:r>
+              <a:rPr lang="de-DE" sz="1800" b="0" u="none" strike="noStrike">
+                <a:solidFill>
+                  <a:srgbClr val="000000"/>
+                </a:solidFill>
+                <a:effectLst/>
+                <a:uFillTx/>
+                <a:latin typeface="Noto Sans"/>
+              </a:rPr>
+              <a:t>1</a:t>
+            </a:r>
+            <a:endParaRPr lang="de-DE" sz="1800" b="0" u="none" strike="noStrike">
+              <a:solidFill>
+                <a:srgbClr val="000000"/>
+              </a:solidFill>
+              <a:effectLst/>
+              <a:uFillTx/>
+              <a:latin typeface="Noto Sans"/>
+            </a:endParaRPr>
+          </a:p>
+        </p:txBody>
+      </p:sp>
+      <p:sp>
+        <p:nvSpPr>
+          <p:cNvPr id="33" name=""/>
+          <p:cNvSpPr txBox="1"/>
+          <p:nvPr/>
+        </p:nvSpPr>
+        <p:spPr>
+          <a:xfrm>
+            <a:off x="3240000" y="2880000"/>
+            <a:ext cx="180000" cy="401400"/>
+          </a:xfrm>
+          <a:prstGeom prst="rect">
+            <a:avLst/>
+          </a:prstGeom>
+          <a:noFill/>
+          <a:ln w="0">
+            <a:noFill/>
+          </a:ln>
+        </p:spPr>
+        <p:txBody>
+          <a:bodyPr lIns="90000" rIns="90000" tIns="45000" bIns="45000" anchor="t">
+            <a:spAutoFit/>
+          </a:bodyPr>
+          <a:p>
+            <a:r>
+              <a:rPr lang="de-DE" sz="1800" b="0" u="none" strike="noStrike">
+                <a:solidFill>
+                  <a:srgbClr val="000000"/>
+                </a:solidFill>
+                <a:effectLst/>
+                <a:uFillTx/>
+                <a:latin typeface="Noto Sans"/>
+              </a:rPr>
+              <a:t>N</a:t>
+            </a:r>
+            <a:endParaRPr lang="de-DE" sz="1800" b="0" u="none" strike="noStrike">
+              <a:solidFill>
+                <a:srgbClr val="000000"/>
+              </a:solidFill>
+              <a:effectLst/>
+              <a:uFillTx/>
+              <a:latin typeface="Noto Sans"/>
+            </a:endParaRPr>
+          </a:p>
+        </p:txBody>
+      </p:sp>
+      <p:sp>
+        <p:nvSpPr>
+          <p:cNvPr id="34" name=""/>
+          <p:cNvSpPr txBox="1"/>
+          <p:nvPr/>
+        </p:nvSpPr>
+        <p:spPr>
+          <a:xfrm>
+            <a:off x="5760000" y="2838600"/>
+            <a:ext cx="360000" cy="401400"/>
+          </a:xfrm>
+          <a:prstGeom prst="rect">
+            <a:avLst/>
+          </a:prstGeom>
+          <a:noFill/>
+          <a:ln w="0">
+            <a:noFill/>
+          </a:ln>
+        </p:spPr>
+        <p:txBody>
+          <a:bodyPr lIns="90000" rIns="90000" tIns="45000" bIns="45000" anchor="t">
+            <a:spAutoFit/>
+          </a:bodyPr>
+          <a:p>
+            <a:r>
+              <a:rPr lang="de-DE" sz="1000" b="0" u="none" strike="noStrike">
+                <a:solidFill>
+                  <a:srgbClr val="000000"/>
+                </a:solidFill>
+                <a:effectLst/>
+                <a:uFillTx/>
+                <a:latin typeface="Noto Sans"/>
+              </a:rPr>
+              <a:t>1</a:t>
+            </a:r>
+            <a:endParaRPr lang="de-DE" sz="1000" b="0" u="none" strike="noStrike">
+              <a:solidFill>
+                <a:srgbClr val="000000"/>
+              </a:solidFill>
+              <a:effectLst/>
+              <a:uFillTx/>
+              <a:latin typeface="Noto Sans"/>
+            </a:endParaRPr>
+          </a:p>
+        </p:txBody>
+      </p:sp>
+      <p:sp>
+        <p:nvSpPr>
+          <p:cNvPr id="35" name=""/>
+          <p:cNvSpPr txBox="1"/>
+          <p:nvPr/>
+        </p:nvSpPr>
+        <p:spPr>
+          <a:xfrm>
+            <a:off x="3060000" y="2838600"/>
+            <a:ext cx="360000" cy="401400"/>
+          </a:xfrm>
+          <a:prstGeom prst="rect">
+            <a:avLst/>
+          </a:prstGeom>
+          <a:noFill/>
+          <a:ln w="0">
+            <a:noFill/>
+          </a:ln>
+        </p:spPr>
+        <p:txBody>
+          <a:bodyPr lIns="90000" rIns="90000" tIns="45000" bIns="45000" anchor="t">
+            <a:spAutoFit/>
+          </a:bodyPr>
+          <a:p>
+            <a:r>
+              <a:rPr lang="de-DE" sz="1000" b="0" u="none" strike="noStrike">
+                <a:solidFill>
+                  <a:srgbClr val="000000"/>
+                </a:solidFill>
+                <a:effectLst/>
+                <a:uFillTx/>
+                <a:latin typeface="Noto Sans"/>
+              </a:rPr>
+              <a:t>N</a:t>
+            </a:r>
+            <a:endParaRPr lang="de-DE" sz="1000" b="0" u="none" strike="noStrike">
+              <a:solidFill>
+                <a:srgbClr val="000000"/>
+              </a:solidFill>
+              <a:effectLst/>
+              <a:uFillTx/>
+              <a:latin typeface="Noto Sans"/>
+            </a:endParaRPr>
+          </a:p>
+        </p:txBody>
+      </p:sp>
     </p:spTree>
   </p:cSld>
   <mc:AlternateContent>
@@ -4179,7 +4363,7 @@
       </p:grpSpPr>
       <p:sp>
         <p:nvSpPr>
-          <p:cNvPr id="32" name="Text 0"/>
+          <p:cNvPr id="36" name="Text 0"/>
           <p:cNvSpPr/>
           <p:nvPr/>
         </p:nvSpPr>
@@ -4240,7 +4424,7 @@
       </p:sp>
       <p:sp>
         <p:nvSpPr>
-          <p:cNvPr id="33" name="Shape 1"/>
+          <p:cNvPr id="37" name="Shape 1"/>
           <p:cNvSpPr/>
           <p:nvPr/>
         </p:nvSpPr>
@@ -4283,7 +4467,7 @@
       </p:sp>
       <p:sp>
         <p:nvSpPr>
-          <p:cNvPr id="34" name="Shape 2"/>
+          <p:cNvPr id="38" name="Shape 2"/>
           <p:cNvSpPr/>
           <p:nvPr/>
         </p:nvSpPr>
@@ -4331,7 +4515,7 @@
       </p:sp>
       <p:sp>
         <p:nvSpPr>
-          <p:cNvPr id="35" name="Shape 3"/>
+          <p:cNvPr id="39" name="Shape 3"/>
           <p:cNvSpPr/>
           <p:nvPr/>
         </p:nvSpPr>
@@ -4379,7 +4563,7 @@
       </p:sp>
       <p:sp>
         <p:nvSpPr>
-          <p:cNvPr id="36" name="Text 4"/>
+          <p:cNvPr id="40" name="Text 4"/>
           <p:cNvSpPr/>
           <p:nvPr/>
         </p:nvSpPr>
@@ -4440,7 +4624,7 @@
       </p:sp>
       <p:sp>
         <p:nvSpPr>
-          <p:cNvPr id="37" name="Text 5"/>
+          <p:cNvPr id="41" name="Text 5"/>
           <p:cNvSpPr/>
           <p:nvPr/>
         </p:nvSpPr>
@@ -4501,7 +4685,7 @@
       </p:sp>
       <p:sp>
         <p:nvSpPr>
-          <p:cNvPr id="38" name="Shape 6"/>
+          <p:cNvPr id="42" name="Shape 6"/>
           <p:cNvSpPr/>
           <p:nvPr/>
         </p:nvSpPr>
@@ -4549,7 +4733,7 @@
       </p:sp>
       <p:sp>
         <p:nvSpPr>
-          <p:cNvPr id="39" name="Shape 7"/>
+          <p:cNvPr id="43" name="Shape 7"/>
           <p:cNvSpPr/>
           <p:nvPr/>
         </p:nvSpPr>
@@ -4597,7 +4781,7 @@
       </p:sp>
       <p:sp>
         <p:nvSpPr>
-          <p:cNvPr id="40" name="Text 8"/>
+          <p:cNvPr id="44" name="Text 8"/>
           <p:cNvSpPr/>
           <p:nvPr/>
         </p:nvSpPr>
@@ -4658,7 +4842,7 @@
       </p:sp>
       <p:sp>
         <p:nvSpPr>
-          <p:cNvPr id="41" name="Text 9"/>
+          <p:cNvPr id="45" name="Text 9"/>
           <p:cNvSpPr/>
           <p:nvPr/>
         </p:nvSpPr>
@@ -4719,7 +4903,7 @@
       </p:sp>
       <p:sp>
         <p:nvSpPr>
-          <p:cNvPr id="42" name="Shape 10"/>
+          <p:cNvPr id="46" name="Shape 10"/>
           <p:cNvSpPr/>
           <p:nvPr/>
         </p:nvSpPr>
@@ -4767,7 +4951,7 @@
       </p:sp>
       <p:sp>
         <p:nvSpPr>
-          <p:cNvPr id="43" name="Shape 11"/>
+          <p:cNvPr id="47" name="Shape 11"/>
           <p:cNvSpPr/>
           <p:nvPr/>
         </p:nvSpPr>
@@ -4815,7 +4999,7 @@
       </p:sp>
       <p:sp>
         <p:nvSpPr>
-          <p:cNvPr id="44" name="Text 12"/>
+          <p:cNvPr id="48" name="Text 12"/>
           <p:cNvSpPr/>
           <p:nvPr/>
         </p:nvSpPr>
@@ -4876,7 +5060,7 @@
       </p:sp>
       <p:sp>
         <p:nvSpPr>
-          <p:cNvPr id="45" name="Text 13"/>
+          <p:cNvPr id="49" name="Text 13"/>
           <p:cNvSpPr/>
           <p:nvPr/>
         </p:nvSpPr>
@@ -4937,7 +5121,7 @@
       </p:sp>
       <p:sp>
         <p:nvSpPr>
-          <p:cNvPr id="46" name="Shape 14"/>
+          <p:cNvPr id="50" name="Shape 14"/>
           <p:cNvSpPr/>
           <p:nvPr/>
         </p:nvSpPr>
@@ -4985,7 +5169,7 @@
       </p:sp>
       <p:sp>
         <p:nvSpPr>
-          <p:cNvPr id="47" name="Shape 15"/>
+          <p:cNvPr id="51" name="Shape 15"/>
           <p:cNvSpPr/>
           <p:nvPr/>
         </p:nvSpPr>
@@ -5033,7 +5217,7 @@
       </p:sp>
       <p:sp>
         <p:nvSpPr>
-          <p:cNvPr id="48" name="Text 16"/>
+          <p:cNvPr id="52" name="Text 16"/>
           <p:cNvSpPr/>
           <p:nvPr/>
         </p:nvSpPr>
@@ -5094,7 +5278,7 @@
       </p:sp>
       <p:sp>
         <p:nvSpPr>
-          <p:cNvPr id="49" name="Text 17"/>
+          <p:cNvPr id="53" name="Text 17"/>
           <p:cNvSpPr/>
           <p:nvPr/>
         </p:nvSpPr>
@@ -5155,7 +5339,7 @@
       </p:sp>
       <p:sp>
         <p:nvSpPr>
-          <p:cNvPr id="50" name="Shape 4"/>
+          <p:cNvPr id="54" name="Shape 4"/>
           <p:cNvSpPr/>
           <p:nvPr/>
         </p:nvSpPr>
@@ -5203,7 +5387,7 @@
       </p:sp>
       <p:sp>
         <p:nvSpPr>
-          <p:cNvPr id="51" name="Shape 9"/>
+          <p:cNvPr id="55" name="Shape 9"/>
           <p:cNvSpPr/>
           <p:nvPr/>
         </p:nvSpPr>
@@ -5251,7 +5435,7 @@
       </p:sp>
       <p:sp>
         <p:nvSpPr>
-          <p:cNvPr id="52" name="Text 22"/>
+          <p:cNvPr id="56" name="Text 22"/>
           <p:cNvSpPr/>
           <p:nvPr/>
         </p:nvSpPr>
@@ -5312,7 +5496,7 @@
       </p:sp>
       <p:sp>
         <p:nvSpPr>
-          <p:cNvPr id="53" name="Text 23"/>
+          <p:cNvPr id="57" name="Text 23"/>
           <p:cNvSpPr/>
           <p:nvPr/>
         </p:nvSpPr>
@@ -5373,7 +5557,7 @@
       </p:sp>
       <p:sp>
         <p:nvSpPr>
-          <p:cNvPr id="54" name=""/>
+          <p:cNvPr id="58" name=""/>
           <p:cNvSpPr txBox="1"/>
           <p:nvPr/>
         </p:nvSpPr>
@@ -5456,7 +5640,7 @@
       </p:grpSpPr>
       <p:sp>
         <p:nvSpPr>
-          <p:cNvPr id="55" name="Text 0"/>
+          <p:cNvPr id="59" name="Text 0"/>
           <p:cNvSpPr/>
           <p:nvPr/>
         </p:nvSpPr>
@@ -5517,7 +5701,7 @@
       </p:sp>
       <p:sp>
         <p:nvSpPr>
-          <p:cNvPr id="56" name="Shape 1"/>
+          <p:cNvPr id="60" name="Shape 1"/>
           <p:cNvSpPr/>
           <p:nvPr/>
         </p:nvSpPr>
@@ -5560,7 +5744,7 @@
       </p:sp>
       <p:sp>
         <p:nvSpPr>
-          <p:cNvPr id="57" name="Shape 2"/>
+          <p:cNvPr id="61" name="Shape 2"/>
           <p:cNvSpPr/>
           <p:nvPr/>
         </p:nvSpPr>
@@ -5608,7 +5792,7 @@
       </p:sp>
       <p:sp>
         <p:nvSpPr>
-          <p:cNvPr id="58" name="Shape 3"/>
+          <p:cNvPr id="62" name="Shape 3"/>
           <p:cNvSpPr/>
           <p:nvPr/>
         </p:nvSpPr>
@@ -5654,7 +5838,7 @@
       </p:sp>
       <p:sp>
         <p:nvSpPr>
-          <p:cNvPr id="59" name="Text 4"/>
+          <p:cNvPr id="63" name="Text 4"/>
           <p:cNvSpPr/>
           <p:nvPr/>
         </p:nvSpPr>
@@ -5715,7 +5899,7 @@
       </p:sp>
       <p:sp>
         <p:nvSpPr>
-          <p:cNvPr id="60" name="Text 5"/>
+          <p:cNvPr id="64" name="Text 5"/>
           <p:cNvSpPr/>
           <p:nvPr/>
         </p:nvSpPr>
@@ -5776,7 +5960,7 @@
       </p:sp>
       <p:sp>
         <p:nvSpPr>
-          <p:cNvPr id="61" name="Text 6"/>
+          <p:cNvPr id="65" name="Text 6"/>
           <p:cNvSpPr/>
           <p:nvPr/>
         </p:nvSpPr>
@@ -5867,7 +6051,7 @@
       </p:sp>
       <p:sp>
         <p:nvSpPr>
-          <p:cNvPr id="62" name="Shape 7"/>
+          <p:cNvPr id="66" name="Shape 7"/>
           <p:cNvSpPr/>
           <p:nvPr/>
         </p:nvSpPr>
@@ -5915,7 +6099,7 @@
       </p:sp>
       <p:sp>
         <p:nvSpPr>
-          <p:cNvPr id="63" name="Shape 8"/>
+          <p:cNvPr id="67" name="Shape 8"/>
           <p:cNvSpPr/>
           <p:nvPr/>
         </p:nvSpPr>
@@ -5961,7 +6145,7 @@
       </p:sp>
       <p:sp>
         <p:nvSpPr>
-          <p:cNvPr id="64" name="Text 9"/>
+          <p:cNvPr id="68" name="Text 9"/>
           <p:cNvSpPr/>
           <p:nvPr/>
         </p:nvSpPr>
@@ -6022,7 +6206,7 @@
       </p:sp>
       <p:sp>
         <p:nvSpPr>
-          <p:cNvPr id="65" name="Text 10"/>
+          <p:cNvPr id="69" name="Text 10"/>
           <p:cNvSpPr/>
           <p:nvPr/>
         </p:nvSpPr>
@@ -6083,7 +6267,7 @@
       </p:sp>
       <p:sp>
         <p:nvSpPr>
-          <p:cNvPr id="66" name="Text 11"/>
+          <p:cNvPr id="70" name="Text 11"/>
           <p:cNvSpPr/>
           <p:nvPr/>
         </p:nvSpPr>
@@ -6174,7 +6358,7 @@
       </p:sp>
       <p:sp>
         <p:nvSpPr>
-          <p:cNvPr id="67" name="Shape 12"/>
+          <p:cNvPr id="71" name="Shape 12"/>
           <p:cNvSpPr/>
           <p:nvPr/>
         </p:nvSpPr>
@@ -6222,7 +6406,7 @@
       </p:sp>
       <p:sp>
         <p:nvSpPr>
-          <p:cNvPr id="68" name="Shape 13"/>
+          <p:cNvPr id="72" name="Shape 13"/>
           <p:cNvSpPr/>
           <p:nvPr/>
         </p:nvSpPr>
@@ -6268,7 +6452,7 @@
       </p:sp>
       <p:sp>
         <p:nvSpPr>
-          <p:cNvPr id="69" name="Text 14"/>
+          <p:cNvPr id="73" name="Text 14"/>
           <p:cNvSpPr/>
           <p:nvPr/>
         </p:nvSpPr>
@@ -6329,7 +6513,7 @@
       </p:sp>
       <p:sp>
         <p:nvSpPr>
-          <p:cNvPr id="70" name="Text 15"/>
+          <p:cNvPr id="74" name="Text 15"/>
           <p:cNvSpPr/>
           <p:nvPr/>
         </p:nvSpPr>
@@ -6390,7 +6574,7 @@
       </p:sp>
       <p:sp>
         <p:nvSpPr>
-          <p:cNvPr id="71" name="Text 16"/>
+          <p:cNvPr id="75" name="Text 16"/>
           <p:cNvSpPr/>
           <p:nvPr/>
         </p:nvSpPr>
@@ -6481,7 +6665,7 @@
       </p:sp>
       <p:sp>
         <p:nvSpPr>
-          <p:cNvPr id="72" name="Shape 17"/>
+          <p:cNvPr id="76" name="Shape 17"/>
           <p:cNvSpPr/>
           <p:nvPr/>
         </p:nvSpPr>
@@ -6529,7 +6713,7 @@
       </p:sp>
       <p:sp>
         <p:nvSpPr>
-          <p:cNvPr id="73" name="Shape 18"/>
+          <p:cNvPr id="77" name="Shape 18"/>
           <p:cNvSpPr/>
           <p:nvPr/>
         </p:nvSpPr>
@@ -6575,7 +6759,7 @@
       </p:sp>
       <p:sp>
         <p:nvSpPr>
-          <p:cNvPr id="74" name="Text 19"/>
+          <p:cNvPr id="78" name="Text 19"/>
           <p:cNvSpPr/>
           <p:nvPr/>
         </p:nvSpPr>
@@ -6636,7 +6820,7 @@
       </p:sp>
       <p:sp>
         <p:nvSpPr>
-          <p:cNvPr id="75" name="Text 20"/>
+          <p:cNvPr id="79" name="Text 20"/>
           <p:cNvSpPr/>
           <p:nvPr/>
         </p:nvSpPr>
@@ -6697,7 +6881,7 @@
       </p:sp>
       <p:sp>
         <p:nvSpPr>
-          <p:cNvPr id="76" name="Text 21"/>
+          <p:cNvPr id="80" name="Text 21"/>
           <p:cNvSpPr/>
           <p:nvPr/>
         </p:nvSpPr>
@@ -6758,7 +6942,7 @@
       </p:sp>
       <p:sp>
         <p:nvSpPr>
-          <p:cNvPr id="77" name="Shape 22"/>
+          <p:cNvPr id="81" name="Shape 22"/>
           <p:cNvSpPr/>
           <p:nvPr/>
         </p:nvSpPr>
@@ -6806,7 +6990,7 @@
       </p:sp>
       <p:sp>
         <p:nvSpPr>
-          <p:cNvPr id="78" name="Shape 23"/>
+          <p:cNvPr id="82" name="Shape 23"/>
           <p:cNvSpPr/>
           <p:nvPr/>
         </p:nvSpPr>
@@ -6852,7 +7036,7 @@
       </p:sp>
       <p:sp>
         <p:nvSpPr>
-          <p:cNvPr id="79" name="Text 24"/>
+          <p:cNvPr id="83" name="Text 24"/>
           <p:cNvSpPr/>
           <p:nvPr/>
         </p:nvSpPr>
@@ -6913,7 +7097,7 @@
       </p:sp>
       <p:sp>
         <p:nvSpPr>
-          <p:cNvPr id="80" name="Text 25"/>
+          <p:cNvPr id="84" name="Text 25"/>
           <p:cNvSpPr/>
           <p:nvPr/>
         </p:nvSpPr>
@@ -6974,7 +7158,7 @@
       </p:sp>
       <p:sp>
         <p:nvSpPr>
-          <p:cNvPr id="81" name="Text 26"/>
+          <p:cNvPr id="85" name="Text 26"/>
           <p:cNvSpPr/>
           <p:nvPr/>
         </p:nvSpPr>
@@ -7117,7 +7301,7 @@
       </p:grpSpPr>
       <p:sp>
         <p:nvSpPr>
-          <p:cNvPr id="82" name="Text 0"/>
+          <p:cNvPr id="86" name="Text 0"/>
           <p:cNvSpPr/>
           <p:nvPr/>
         </p:nvSpPr>
@@ -7178,7 +7362,7 @@
       </p:sp>
       <p:sp>
         <p:nvSpPr>
-          <p:cNvPr id="83" name="Shape 1"/>
+          <p:cNvPr id="87" name="Shape 1"/>
           <p:cNvSpPr/>
           <p:nvPr/>
         </p:nvSpPr>
@@ -7221,7 +7405,7 @@
       </p:sp>
       <p:sp>
         <p:nvSpPr>
-          <p:cNvPr id="84" name="Shape 2"/>
+          <p:cNvPr id="88" name="Shape 2"/>
           <p:cNvSpPr/>
           <p:nvPr/>
         </p:nvSpPr>
@@ -7267,7 +7451,7 @@
       </p:sp>
       <p:sp>
         <p:nvSpPr>
-          <p:cNvPr id="85" name="Text 3"/>
+          <p:cNvPr id="89" name="Text 3"/>
           <p:cNvSpPr/>
           <p:nvPr/>
         </p:nvSpPr>
@@ -7328,7 +7512,7 @@
       </p:sp>
       <p:sp>
         <p:nvSpPr>
-          <p:cNvPr id="86" name="Text 4"/>
+          <p:cNvPr id="90" name="Text 4"/>
           <p:cNvSpPr/>
           <p:nvPr/>
         </p:nvSpPr>
@@ -7389,7 +7573,7 @@
       </p:sp>
       <p:sp>
         <p:nvSpPr>
-          <p:cNvPr id="87" name="Shape 5"/>
+          <p:cNvPr id="91" name="Shape 5"/>
           <p:cNvSpPr/>
           <p:nvPr/>
         </p:nvSpPr>
@@ -7435,7 +7619,7 @@
       </p:sp>
       <p:sp>
         <p:nvSpPr>
-          <p:cNvPr id="88" name="Text 6"/>
+          <p:cNvPr id="92" name="Text 6"/>
           <p:cNvSpPr/>
           <p:nvPr/>
         </p:nvSpPr>
@@ -7496,7 +7680,7 @@
       </p:sp>
       <p:sp>
         <p:nvSpPr>
-          <p:cNvPr id="89" name="Text 7"/>
+          <p:cNvPr id="93" name="Text 7"/>
           <p:cNvSpPr/>
           <p:nvPr/>
         </p:nvSpPr>
@@ -7557,7 +7741,7 @@
       </p:sp>
       <p:sp>
         <p:nvSpPr>
-          <p:cNvPr id="90" name="Shape 8"/>
+          <p:cNvPr id="94" name="Shape 8"/>
           <p:cNvSpPr/>
           <p:nvPr/>
         </p:nvSpPr>
@@ -7603,7 +7787,7 @@
       </p:sp>
       <p:sp>
         <p:nvSpPr>
-          <p:cNvPr id="91" name="Text 9"/>
+          <p:cNvPr id="95" name="Text 9"/>
           <p:cNvSpPr/>
           <p:nvPr/>
         </p:nvSpPr>
@@ -7664,7 +7848,7 @@
       </p:sp>
       <p:sp>
         <p:nvSpPr>
-          <p:cNvPr id="92" name="Text 10"/>
+          <p:cNvPr id="96" name="Text 10"/>
           <p:cNvSpPr/>
           <p:nvPr/>
         </p:nvSpPr>
@@ -7725,7 +7909,7 @@
       </p:sp>
       <p:sp>
         <p:nvSpPr>
-          <p:cNvPr id="93" name="Shape 11"/>
+          <p:cNvPr id="97" name="Shape 11"/>
           <p:cNvSpPr/>
           <p:nvPr/>
         </p:nvSpPr>
@@ -7771,7 +7955,7 @@
       </p:sp>
       <p:sp>
         <p:nvSpPr>
-          <p:cNvPr id="94" name="Text 12"/>
+          <p:cNvPr id="98" name="Text 12"/>
           <p:cNvSpPr/>
           <p:nvPr/>
         </p:nvSpPr>
@@ -7832,7 +8016,7 @@
       </p:sp>
       <p:sp>
         <p:nvSpPr>
-          <p:cNvPr id="95" name="Text 13"/>
+          <p:cNvPr id="99" name="Text 13"/>
           <p:cNvSpPr/>
           <p:nvPr/>
         </p:nvSpPr>
@@ -7893,7 +8077,7 @@
       </p:sp>
       <p:sp>
         <p:nvSpPr>
-          <p:cNvPr id="96" name="Shape 14"/>
+          <p:cNvPr id="100" name="Shape 14"/>
           <p:cNvSpPr/>
           <p:nvPr/>
         </p:nvSpPr>
@@ -7939,7 +8123,7 @@
       </p:sp>
       <p:sp>
         <p:nvSpPr>
-          <p:cNvPr id="97" name="Text 15"/>
+          <p:cNvPr id="101" name="Text 15"/>
           <p:cNvSpPr/>
           <p:nvPr/>
         </p:nvSpPr>
@@ -8000,7 +8184,7 @@
       </p:sp>
       <p:sp>
         <p:nvSpPr>
-          <p:cNvPr id="98" name="Text 16"/>
+          <p:cNvPr id="102" name="Text 16"/>
           <p:cNvSpPr/>
           <p:nvPr/>
         </p:nvSpPr>
@@ -8061,7 +8245,7 @@
       </p:sp>
       <p:sp>
         <p:nvSpPr>
-          <p:cNvPr id="99" name="Shape 17"/>
+          <p:cNvPr id="103" name="Shape 17"/>
           <p:cNvSpPr/>
           <p:nvPr/>
         </p:nvSpPr>
@@ -8107,7 +8291,7 @@
       </p:sp>
       <p:sp>
         <p:nvSpPr>
-          <p:cNvPr id="100" name="Text 18"/>
+          <p:cNvPr id="104" name="Text 18"/>
           <p:cNvSpPr/>
           <p:nvPr/>
         </p:nvSpPr>
@@ -8168,7 +8352,7 @@
       </p:sp>
       <p:sp>
         <p:nvSpPr>
-          <p:cNvPr id="101" name="Text 19"/>
+          <p:cNvPr id="105" name="Text 19"/>
           <p:cNvSpPr/>
           <p:nvPr/>
         </p:nvSpPr>
@@ -8266,7 +8450,7 @@
       </p:grpSpPr>
       <p:sp>
         <p:nvSpPr>
-          <p:cNvPr id="102" name="Text 0"/>
+          <p:cNvPr id="106" name="Text 0"/>
           <p:cNvSpPr/>
           <p:nvPr/>
         </p:nvSpPr>
@@ -8327,7 +8511,7 @@
       </p:sp>
       <p:sp>
         <p:nvSpPr>
-          <p:cNvPr id="103" name="Shape 1"/>
+          <p:cNvPr id="107" name="Shape 1"/>
           <p:cNvSpPr/>
           <p:nvPr/>
         </p:nvSpPr>
@@ -8370,7 +8554,7 @@
       </p:sp>
       <p:sp>
         <p:nvSpPr>
-          <p:cNvPr id="104" name="Shape 2"/>
+          <p:cNvPr id="108" name="Shape 2"/>
           <p:cNvSpPr/>
           <p:nvPr/>
         </p:nvSpPr>
@@ -8418,7 +8602,7 @@
       </p:sp>
       <p:sp>
         <p:nvSpPr>
-          <p:cNvPr id="105" name="Text 3"/>
+          <p:cNvPr id="109" name="Text 3"/>
           <p:cNvSpPr/>
           <p:nvPr/>
         </p:nvSpPr>
@@ -8479,7 +8663,7 @@
       </p:sp>
       <p:sp>
         <p:nvSpPr>
-          <p:cNvPr id="106" name="Text 4"/>
+          <p:cNvPr id="110" name="Text 4"/>
           <p:cNvSpPr/>
           <p:nvPr/>
         </p:nvSpPr>
@@ -8670,7 +8854,7 @@
       </p:sp>
       <p:sp>
         <p:nvSpPr>
-          <p:cNvPr id="107" name="Shape 5"/>
+          <p:cNvPr id="111" name="Shape 5"/>
           <p:cNvSpPr/>
           <p:nvPr/>
         </p:nvSpPr>
@@ -8718,7 +8902,7 @@
       </p:sp>
       <p:sp>
         <p:nvSpPr>
-          <p:cNvPr id="108" name="Text 6"/>
+          <p:cNvPr id="112" name="Text 6"/>
           <p:cNvSpPr/>
           <p:nvPr/>
         </p:nvSpPr>
@@ -8779,7 +8963,7 @@
       </p:sp>
       <p:sp>
         <p:nvSpPr>
-          <p:cNvPr id="109" name="Text 7"/>
+          <p:cNvPr id="113" name="Text 7"/>
           <p:cNvSpPr/>
           <p:nvPr/>
         </p:nvSpPr>
@@ -8975,7 +9159,7 @@
       </p:grpSpPr>
       <p:sp>
         <p:nvSpPr>
-          <p:cNvPr id="110" name="Text 27"/>
+          <p:cNvPr id="114" name="Text 27"/>
           <p:cNvSpPr/>
           <p:nvPr/>
         </p:nvSpPr>
@@ -9036,7 +9220,7 @@
       </p:sp>
       <p:sp>
         <p:nvSpPr>
-          <p:cNvPr id="111" name="Shape 16"/>
+          <p:cNvPr id="115" name="Shape 16"/>
           <p:cNvSpPr/>
           <p:nvPr/>
         </p:nvSpPr>
@@ -9079,7 +9263,7 @@
       </p:sp>
       <p:sp>
         <p:nvSpPr>
-          <p:cNvPr id="112" name="Shape 19"/>
+          <p:cNvPr id="116" name="Shape 19"/>
           <p:cNvSpPr/>
           <p:nvPr/>
         </p:nvSpPr>
@@ -9127,7 +9311,7 @@
       </p:sp>
       <p:sp>
         <p:nvSpPr>
-          <p:cNvPr id="113" name="Text 29"/>
+          <p:cNvPr id="117" name="Text 29"/>
           <p:cNvSpPr/>
           <p:nvPr/>
         </p:nvSpPr>
@@ -9309,7 +9493,7 @@
       </p:grpSpPr>
       <p:sp>
         <p:nvSpPr>
-          <p:cNvPr id="114" name="Text 28"/>
+          <p:cNvPr id="118" name="Text 28"/>
           <p:cNvSpPr/>
           <p:nvPr/>
         </p:nvSpPr>
@@ -9370,7 +9554,7 @@
       </p:sp>
       <p:sp>
         <p:nvSpPr>
-          <p:cNvPr id="115" name="Shape 20"/>
+          <p:cNvPr id="119" name="Shape 20"/>
           <p:cNvSpPr/>
           <p:nvPr/>
         </p:nvSpPr>
@@ -9413,7 +9597,7 @@
       </p:sp>
       <p:sp>
         <p:nvSpPr>
-          <p:cNvPr id="116" name="Shape 21"/>
+          <p:cNvPr id="120" name="Shape 21"/>
           <p:cNvSpPr/>
           <p:nvPr/>
         </p:nvSpPr>
@@ -9461,7 +9645,7 @@
       </p:sp>
       <p:sp>
         <p:nvSpPr>
-          <p:cNvPr id="117" name="Text 30"/>
+          <p:cNvPr id="121" name="Text 30"/>
           <p:cNvSpPr/>
           <p:nvPr/>
         </p:nvSpPr>
@@ -9609,7 +9793,7 @@
       </p:sp>
       <p:pic>
         <p:nvPicPr>
-          <p:cNvPr id="118" name=""/>
+          <p:cNvPr id="122" name=""/>
           <p:cNvPicPr/>
           <p:nvPr/>
         </p:nvPicPr>

--- a/GerMan_Präsi.pptx
+++ b/GerMan_Präsi.pptx
@@ -765,7 +765,7 @@
         <p:spPr>
           <a:xfrm>
             <a:off x="685800" y="1143000"/>
-            <a:ext cx="5486040" cy="3085920"/>
+            <a:ext cx="5486400" cy="3086100"/>
           </a:xfrm>
           <a:prstGeom prst="rect">
             <a:avLst/>
@@ -2018,7 +2018,7 @@
         <p:spPr>
           <a:xfrm>
             <a:off x="685800" y="1143000"/>
-            <a:ext cx="5486040" cy="3085920"/>
+            <a:ext cx="5486400" cy="3086100"/>
           </a:xfrm>
           <a:prstGeom prst="rect">
             <a:avLst/>
@@ -2197,7 +2197,7 @@
         <p:spPr>
           <a:xfrm>
             <a:off x="685800" y="1143000"/>
-            <a:ext cx="5486040" cy="3085920"/>
+            <a:ext cx="5486400" cy="3086100"/>
           </a:xfrm>
           <a:prstGeom prst="rect">
             <a:avLst/>
@@ -3497,7 +3497,7 @@
               </a:tabLst>
             </a:pPr>
             <a:r>
-              <a:rPr lang="en-US" sz="1600" b="0" u="none" strike="noStrike">
+              <a:rPr lang="en-US" sz="1600" b="0" u="none" strike="noStrike" dirty="0" err="1">
                 <a:solidFill>
                   <a:srgbClr val="E8EEF7"/>
                 </a:solidFill>
@@ -3506,9 +3506,151 @@
                 <a:latin typeface="Calibri"/>
                 <a:ea typeface="Calibri"/>
               </a:rPr>
-              <a:t>GerMan ist eine simple und kompetente Lösung von Hardware Verwaltungs Problemen</a:t>
-            </a:r>
-            <a:endParaRPr lang="de-DE" sz="1600" b="0" u="none" strike="noStrike">
+              <a:t>GerMan</a:t>
+            </a:r>
+            <a:r>
+              <a:rPr lang="en-US" sz="1600" b="0" u="none" strike="noStrike" dirty="0">
+                <a:solidFill>
+                  <a:srgbClr val="E8EEF7"/>
+                </a:solidFill>
+                <a:effectLst/>
+                <a:uFillTx/>
+                <a:latin typeface="Calibri"/>
+                <a:ea typeface="Calibri"/>
+              </a:rPr>
+              <a:t> </a:t>
+            </a:r>
+            <a:r>
+              <a:rPr lang="en-US" sz="1600" b="0" u="none" strike="noStrike" dirty="0" err="1">
+                <a:solidFill>
+                  <a:srgbClr val="E8EEF7"/>
+                </a:solidFill>
+                <a:effectLst/>
+                <a:uFillTx/>
+                <a:latin typeface="Calibri"/>
+                <a:ea typeface="Calibri"/>
+              </a:rPr>
+              <a:t>ist</a:t>
+            </a:r>
+            <a:r>
+              <a:rPr lang="en-US" sz="1600" b="0" u="none" strike="noStrike" dirty="0">
+                <a:solidFill>
+                  <a:srgbClr val="E8EEF7"/>
+                </a:solidFill>
+                <a:effectLst/>
+                <a:uFillTx/>
+                <a:latin typeface="Calibri"/>
+                <a:ea typeface="Calibri"/>
+              </a:rPr>
+              <a:t> </a:t>
+            </a:r>
+            <a:r>
+              <a:rPr lang="en-US" sz="1600" b="0" u="none" strike="noStrike" dirty="0" err="1">
+                <a:solidFill>
+                  <a:srgbClr val="E8EEF7"/>
+                </a:solidFill>
+                <a:effectLst/>
+                <a:uFillTx/>
+                <a:latin typeface="Calibri"/>
+                <a:ea typeface="Calibri"/>
+              </a:rPr>
+              <a:t>eine</a:t>
+            </a:r>
+            <a:r>
+              <a:rPr lang="en-US" sz="1600" b="0" u="none" strike="noStrike" dirty="0">
+                <a:solidFill>
+                  <a:srgbClr val="E8EEF7"/>
+                </a:solidFill>
+                <a:effectLst/>
+                <a:uFillTx/>
+                <a:latin typeface="Calibri"/>
+                <a:ea typeface="Calibri"/>
+              </a:rPr>
+              <a:t> simple und </a:t>
+            </a:r>
+            <a:r>
+              <a:rPr lang="en-US" sz="1600" b="0" u="none" strike="noStrike" dirty="0" err="1">
+                <a:solidFill>
+                  <a:srgbClr val="E8EEF7"/>
+                </a:solidFill>
+                <a:effectLst/>
+                <a:uFillTx/>
+                <a:latin typeface="Calibri"/>
+                <a:ea typeface="Calibri"/>
+              </a:rPr>
+              <a:t>kompetente</a:t>
+            </a:r>
+            <a:r>
+              <a:rPr lang="en-US" sz="1600" b="0" u="none" strike="noStrike" dirty="0">
+                <a:solidFill>
+                  <a:srgbClr val="E8EEF7"/>
+                </a:solidFill>
+                <a:effectLst/>
+                <a:uFillTx/>
+                <a:latin typeface="Calibri"/>
+                <a:ea typeface="Calibri"/>
+              </a:rPr>
+              <a:t> </a:t>
+            </a:r>
+            <a:r>
+              <a:rPr lang="en-US" sz="1600" b="0" u="none" strike="noStrike" dirty="0" err="1">
+                <a:solidFill>
+                  <a:srgbClr val="E8EEF7"/>
+                </a:solidFill>
+                <a:effectLst/>
+                <a:uFillTx/>
+                <a:latin typeface="Calibri"/>
+                <a:ea typeface="Calibri"/>
+              </a:rPr>
+              <a:t>Lösung</a:t>
+            </a:r>
+            <a:r>
+              <a:rPr lang="en-US" sz="1600" b="0" u="none" strike="noStrike" dirty="0">
+                <a:solidFill>
+                  <a:srgbClr val="E8EEF7"/>
+                </a:solidFill>
+                <a:effectLst/>
+                <a:uFillTx/>
+                <a:latin typeface="Calibri"/>
+                <a:ea typeface="Calibri"/>
+              </a:rPr>
+              <a:t> von </a:t>
+            </a:r>
+            <a:r>
+              <a:rPr lang="en-US" sz="1600" b="0" u="none" strike="noStrike" dirty="0" err="1">
+                <a:solidFill>
+                  <a:srgbClr val="E8EEF7"/>
+                </a:solidFill>
+                <a:effectLst/>
+                <a:uFillTx/>
+                <a:latin typeface="Calibri"/>
+                <a:ea typeface="Calibri"/>
+              </a:rPr>
+              <a:t>Hardwareverwaltungs</a:t>
+            </a:r>
+            <a:r>
+              <a:rPr lang="en-US" sz="1600" dirty="0" err="1">
+                <a:solidFill>
+                  <a:srgbClr val="E8EEF7"/>
+                </a:solidFill>
+                <a:latin typeface="Calibri"/>
+                <a:ea typeface="Calibri"/>
+              </a:rPr>
+              <a:t>p</a:t>
+            </a:r>
+            <a:r>
+              <a:rPr lang="en-US" sz="1600" b="0" u="none" strike="noStrike" dirty="0" err="1">
+                <a:solidFill>
+                  <a:srgbClr val="E8EEF7"/>
+                </a:solidFill>
+                <a:effectLst/>
+                <a:uFillTx/>
+                <a:latin typeface="Calibri"/>
+                <a:ea typeface="Calibri"/>
+              </a:rPr>
+              <a:t>roblemen</a:t>
+            </a:r>
+            <a:endParaRPr lang="de-DE" sz="1600" b="0" u="none" strike="noStrike" dirty="0">
               <a:solidFill>
                 <a:srgbClr val="FFFFFF"/>
               </a:solidFill>
@@ -3556,15 +3698,24 @@
           </a:bodyPr>
           <a:lstStyle/>
           <a:p>
-            <a:pPr defTabSz="914400">
-              <a:lnSpc>
-                <a:spcPct val="100000"/>
-              </a:lnSpc>
+            <a:pPr>
               <a:tabLst>
                 <a:tab pos="0" algn="l"/>
               </a:tabLst>
             </a:pPr>
             <a:r>
+              <a:rPr lang="en-US" sz="1400" b="1" u="none" strike="noStrike" dirty="0">
+                <a:solidFill>
+                  <a:srgbClr val="FFFFFF"/>
+                </a:solidFill>
+                <a:effectLst/>
+                <a:uFillTx/>
+                <a:latin typeface="Calibri"/>
+                <a:ea typeface="Calibri"/>
+              </a:rPr>
+              <a:t>Adrian – </a:t>
+            </a:r>
+            <a:r>
               <a:rPr lang="en-US" sz="1400" b="1" u="none" strike="noStrike">
                 <a:solidFill>
                   <a:srgbClr val="FFFFFF"/>
@@ -3574,9 +3725,31 @@
                 <a:latin typeface="Calibri"/>
                 <a:ea typeface="Calibri"/>
               </a:rPr>
-              <a:t>Adrian – Eliano - Daniel</a:t>
-            </a:r>
-            <a:endParaRPr lang="de-DE" sz="1400" b="0" u="none" strike="noStrike">
+              <a:t>Eliano –</a:t>
+            </a:r>
+            <a:r>
+              <a:rPr lang="en-US" sz="1400" b="1">
+                <a:solidFill>
+                  <a:srgbClr val="FFFFFF"/>
+                </a:solidFill>
+                <a:latin typeface="Calibri"/>
+                <a:ea typeface="Calibri"/>
+              </a:rPr>
+              <a:t> </a:t>
+            </a:r>
+            <a:r>
+              <a:rPr lang="en-US" sz="1400" b="1" u="none" strike="noStrike" dirty="0">
+                <a:solidFill>
+                  <a:srgbClr val="FFFFFF"/>
+                </a:solidFill>
+                <a:effectLst/>
+                <a:uFillTx/>
+                <a:latin typeface="Calibri"/>
+                <a:ea typeface="Calibri"/>
+              </a:rPr>
+              <a:t>Daniel</a:t>
+            </a:r>
+            <a:endParaRPr lang="de-DE" sz="1400" b="0" u="none" strike="noStrike" dirty="0">
               <a:solidFill>
                 <a:srgbClr val="FFFFFF"/>
               </a:solidFill>
@@ -10312,7 +10485,7 @@
           </a:bodyPr>
           <a:lstStyle/>
           <a:p>
-            <a:endParaRPr lang="de-DE" sz="1800" b="0" u="none" strike="noStrike">
+            <a:endParaRPr lang="de-DE" sz="1800" b="0" u="none" strike="noStrike" dirty="0">
               <a:solidFill>
                 <a:srgbClr val="000000"/>
               </a:solidFill>
@@ -10377,7 +10550,7 @@
               <a:buChar char=""/>
             </a:pPr>
             <a:r>
-              <a:rPr lang="en-US" sz="1300" b="0" u="none" strike="noStrike">
+              <a:rPr lang="en-US" sz="1300" b="0" u="none" strike="noStrike" dirty="0" err="1">
                 <a:solidFill>
                   <a:srgbClr val="1A1A2E"/>
                 </a:solidFill>
@@ -10386,9 +10559,141 @@
                 <a:latin typeface="Calibri"/>
                 <a:ea typeface="Calibri"/>
               </a:rPr>
-              <a:t>Ergänzung durch weitere Tabellen, wie z.B Mitarbeiter </a:t>
-            </a:r>
-            <a:endParaRPr lang="de-DE" sz="1300" b="0" u="none" strike="noStrike">
+              <a:t>Ergänzung</a:t>
+            </a:r>
+            <a:r>
+              <a:rPr lang="en-US" sz="1300" b="0" u="none" strike="noStrike" dirty="0">
+                <a:solidFill>
+                  <a:srgbClr val="1A1A2E"/>
+                </a:solidFill>
+                <a:effectLst/>
+                <a:uFillTx/>
+                <a:latin typeface="Calibri"/>
+                <a:ea typeface="Calibri"/>
+              </a:rPr>
+              <a:t> </a:t>
+            </a:r>
+            <a:r>
+              <a:rPr lang="en-US" sz="1300" b="0" u="none" strike="noStrike" dirty="0" err="1">
+                <a:solidFill>
+                  <a:srgbClr val="1A1A2E"/>
+                </a:solidFill>
+                <a:effectLst/>
+                <a:uFillTx/>
+                <a:latin typeface="Calibri"/>
+                <a:ea typeface="Calibri"/>
+              </a:rPr>
+              <a:t>durch</a:t>
+            </a:r>
+            <a:r>
+              <a:rPr lang="en-US" sz="1300" b="0" u="none" strike="noStrike" dirty="0">
+                <a:solidFill>
+                  <a:srgbClr val="1A1A2E"/>
+                </a:solidFill>
+                <a:effectLst/>
+                <a:uFillTx/>
+                <a:latin typeface="Calibri"/>
+                <a:ea typeface="Calibri"/>
+              </a:rPr>
+              <a:t> </a:t>
+            </a:r>
+            <a:r>
+              <a:rPr lang="en-US" sz="1300" b="0" u="none" strike="noStrike" dirty="0" err="1">
+                <a:solidFill>
+                  <a:srgbClr val="1A1A2E"/>
+                </a:solidFill>
+                <a:effectLst/>
+                <a:uFillTx/>
+                <a:latin typeface="Calibri"/>
+                <a:ea typeface="Calibri"/>
+              </a:rPr>
+              <a:t>weitere</a:t>
+            </a:r>
+            <a:r>
+              <a:rPr lang="en-US" sz="1300" b="0" u="none" strike="noStrike" dirty="0">
+                <a:solidFill>
+                  <a:srgbClr val="1A1A2E"/>
+                </a:solidFill>
+                <a:effectLst/>
+                <a:uFillTx/>
+                <a:latin typeface="Calibri"/>
+                <a:ea typeface="Calibri"/>
+              </a:rPr>
+              <a:t> </a:t>
+            </a:r>
+            <a:r>
+              <a:rPr lang="en-US" sz="1300" b="0" u="none" strike="noStrike" dirty="0" err="1">
+                <a:solidFill>
+                  <a:srgbClr val="1A1A2E"/>
+                </a:solidFill>
+                <a:effectLst/>
+                <a:uFillTx/>
+                <a:latin typeface="Calibri"/>
+                <a:ea typeface="Calibri"/>
+              </a:rPr>
+              <a:t>Tabellen</a:t>
+            </a:r>
+            <a:r>
+              <a:rPr lang="en-US" sz="1300" b="0" u="none" strike="noStrike" dirty="0">
+                <a:solidFill>
+                  <a:srgbClr val="1A1A2E"/>
+                </a:solidFill>
+                <a:effectLst/>
+                <a:uFillTx/>
+                <a:latin typeface="Calibri"/>
+                <a:ea typeface="Calibri"/>
+              </a:rPr>
+              <a:t>, </a:t>
+            </a:r>
+            <a:r>
+              <a:rPr lang="en-US" sz="1300" b="0" u="none" strike="noStrike" dirty="0" err="1">
+                <a:solidFill>
+                  <a:srgbClr val="1A1A2E"/>
+                </a:solidFill>
+                <a:effectLst/>
+                <a:uFillTx/>
+                <a:latin typeface="Calibri"/>
+                <a:ea typeface="Calibri"/>
+              </a:rPr>
+              <a:t>wie</a:t>
+            </a:r>
+            <a:r>
+              <a:rPr lang="en-US" sz="1300" b="0" u="none" strike="noStrike" dirty="0">
+                <a:solidFill>
+                  <a:srgbClr val="1A1A2E"/>
+                </a:solidFill>
+                <a:effectLst/>
+                <a:uFillTx/>
+                <a:latin typeface="Calibri"/>
+                <a:ea typeface="Calibri"/>
+              </a:rPr>
+              <a:t> </a:t>
+            </a:r>
+            <a:r>
+              <a:rPr lang="en-US" sz="1300" b="0" u="none" strike="noStrike" dirty="0" err="1">
+                <a:solidFill>
+                  <a:srgbClr val="1A1A2E"/>
+                </a:solidFill>
+                <a:effectLst/>
+                <a:uFillTx/>
+                <a:latin typeface="Calibri"/>
+                <a:ea typeface="Calibri"/>
+              </a:rPr>
+              <a:t>z.B</a:t>
+            </a:r>
+            <a:r>
+              <a:rPr lang="en-US" sz="1300" b="0" u="none" strike="noStrike" dirty="0">
+                <a:solidFill>
+                  <a:srgbClr val="1A1A2E"/>
+                </a:solidFill>
+                <a:effectLst/>
+                <a:uFillTx/>
+                <a:latin typeface="Calibri"/>
+                <a:ea typeface="Calibri"/>
+              </a:rPr>
+              <a:t> Mitarbeiter </a:t>
+            </a:r>
+            <a:endParaRPr lang="de-DE" sz="1300" b="0" u="none" strike="noStrike" dirty="0">
               <a:solidFill>
                 <a:srgbClr val="000000"/>
               </a:solidFill>
@@ -10415,7 +10720,7 @@
               <a:buChar char=""/>
             </a:pPr>
             <a:r>
-              <a:rPr lang="en-US" sz="1300" b="0" u="none" strike="noStrike">
+              <a:rPr lang="en-US" sz="1300" b="0" u="none" strike="noStrike" dirty="0" err="1">
                 <a:solidFill>
                   <a:srgbClr val="1A1A2E"/>
                 </a:solidFill>
@@ -10424,9 +10729,33 @@
                 <a:latin typeface="Calibri"/>
                 <a:ea typeface="Calibri"/>
               </a:rPr>
-              <a:t>Erweiterung von Attributen</a:t>
-            </a:r>
-            <a:endParaRPr lang="de-DE" sz="1300" b="0" u="none" strike="noStrike">
+              <a:t>Erweiterung</a:t>
+            </a:r>
+            <a:r>
+              <a:rPr lang="en-US" sz="1300" b="0" u="none" strike="noStrike" dirty="0">
+                <a:solidFill>
+                  <a:srgbClr val="1A1A2E"/>
+                </a:solidFill>
+                <a:effectLst/>
+                <a:uFillTx/>
+                <a:latin typeface="Calibri"/>
+                <a:ea typeface="Calibri"/>
+              </a:rPr>
+              <a:t> von </a:t>
+            </a:r>
+            <a:r>
+              <a:rPr lang="en-US" sz="1300" b="0" u="none" strike="noStrike" dirty="0" err="1">
+                <a:solidFill>
+                  <a:srgbClr val="1A1A2E"/>
+                </a:solidFill>
+                <a:effectLst/>
+                <a:uFillTx/>
+                <a:latin typeface="Calibri"/>
+                <a:ea typeface="Calibri"/>
+              </a:rPr>
+              <a:t>Attributen</a:t>
+            </a:r>
+            <a:endParaRPr lang="de-DE" sz="1300" b="0" u="none" strike="noStrike" dirty="0">
               <a:solidFill>
                 <a:srgbClr val="000000"/>
               </a:solidFill>
@@ -10453,7 +10782,7 @@
               <a:buChar char=""/>
             </a:pPr>
             <a:r>
-              <a:rPr lang="en-US" sz="1300" b="0" u="none" strike="noStrike">
+              <a:rPr lang="en-US" sz="1300" b="0" u="none" strike="noStrike" dirty="0" err="1">
                 <a:solidFill>
                   <a:srgbClr val="1A1A2E"/>
                 </a:solidFill>
@@ -10462,15 +10791,104 @@
                 <a:latin typeface="Calibri"/>
                 <a:ea typeface="Calibri"/>
               </a:rPr>
-              <a:t>Authentifizierungen durch Benutzer Accounts</a:t>
-            </a:r>
-            <a:endParaRPr lang="de-DE" sz="1300" b="0" u="none" strike="noStrike">
-              <a:solidFill>
-                <a:srgbClr val="000000"/>
-              </a:solidFill>
-              <a:effectLst/>
-              <a:uFillTx/>
-              <a:latin typeface="Noto Sans"/>
+              <a:t>Authentifizierungen</a:t>
+            </a:r>
+            <a:r>
+              <a:rPr lang="en-US" sz="1300" b="0" u="none" strike="noStrike" dirty="0">
+                <a:solidFill>
+                  <a:srgbClr val="1A1A2E"/>
+                </a:solidFill>
+                <a:effectLst/>
+                <a:uFillTx/>
+                <a:latin typeface="Calibri"/>
+                <a:ea typeface="Calibri"/>
+              </a:rPr>
+              <a:t> </a:t>
+            </a:r>
+            <a:r>
+              <a:rPr lang="en-US" sz="1300" b="0" u="none" strike="noStrike" dirty="0" err="1">
+                <a:solidFill>
+                  <a:srgbClr val="1A1A2E"/>
+                </a:solidFill>
+                <a:effectLst/>
+                <a:uFillTx/>
+                <a:latin typeface="Calibri"/>
+                <a:ea typeface="Calibri"/>
+              </a:rPr>
+              <a:t>durch</a:t>
+            </a:r>
+            <a:r>
+              <a:rPr lang="en-US" sz="1300" b="0" u="none" strike="noStrike" dirty="0">
+                <a:solidFill>
+                  <a:srgbClr val="1A1A2E"/>
+                </a:solidFill>
+                <a:effectLst/>
+                <a:uFillTx/>
+                <a:latin typeface="Calibri"/>
+                <a:ea typeface="Calibri"/>
+              </a:rPr>
+              <a:t> </a:t>
+            </a:r>
+            <a:r>
+              <a:rPr lang="en-US" sz="1300" b="0" u="none" strike="noStrike" dirty="0" err="1">
+                <a:solidFill>
+                  <a:srgbClr val="1A1A2E"/>
+                </a:solidFill>
+                <a:effectLst/>
+                <a:uFillTx/>
+                <a:latin typeface="Calibri"/>
+                <a:ea typeface="Calibri"/>
+              </a:rPr>
+              <a:t>Benutzer</a:t>
+            </a:r>
+            <a:r>
+              <a:rPr lang="en-US" sz="1300" b="0" u="none" strike="noStrike" dirty="0">
+                <a:solidFill>
+                  <a:srgbClr val="1A1A2E"/>
+                </a:solidFill>
+                <a:effectLst/>
+                <a:uFillTx/>
+                <a:latin typeface="Calibri"/>
+                <a:ea typeface="Calibri"/>
+              </a:rPr>
+              <a:t> Accounts</a:t>
+            </a:r>
+          </a:p>
+          <a:p>
+            <a:pPr marL="343080" indent="-343080" defTabSz="914400">
+              <a:lnSpc>
+                <a:spcPct val="100000"/>
+              </a:lnSpc>
+              <a:spcBef>
+                <a:spcPts val="283"/>
+              </a:spcBef>
+              <a:spcAft>
+                <a:spcPts val="283"/>
+              </a:spcAft>
+              <a:buClr>
+                <a:srgbClr val="1A1A2E"/>
+              </a:buClr>
+              <a:buFont typeface="Symbol" charset="2"/>
+              <a:buChar char=""/>
+            </a:pPr>
+            <a:r>
+              <a:rPr lang="en-US" sz="1300" dirty="0" err="1">
+                <a:solidFill>
+                  <a:srgbClr val="1A1A2E"/>
+                </a:solidFill>
+                <a:latin typeface="Calibri"/>
+                <a:ea typeface="Calibri"/>
+              </a:rPr>
+              <a:t>Modularität</a:t>
+            </a:r>
+            <a:endParaRPr lang="en-US" sz="1300" b="0" u="none" strike="noStrike" dirty="0">
+              <a:solidFill>
+                <a:srgbClr val="1A1A2E"/>
+              </a:solidFill>
+              <a:effectLst/>
+              <a:uFillTx/>
+              <a:latin typeface="Calibri"/>
+              <a:ea typeface="Calibri"/>
             </a:endParaRPr>
           </a:p>
         </p:txBody>
@@ -10735,7 +11153,7 @@
               <a:buChar char=""/>
             </a:pPr>
             <a:r>
-              <a:rPr lang="en-US" sz="1300" b="0" u="none" strike="noStrike">
+              <a:rPr lang="en-US" sz="1300" b="0" u="none" strike="noStrike" dirty="0" err="1">
                 <a:solidFill>
                   <a:srgbClr val="1A1A2E"/>
                 </a:solidFill>
@@ -10744,9 +11162,141 @@
                 <a:latin typeface="Calibri"/>
                 <a:ea typeface="Calibri"/>
               </a:rPr>
-              <a:t>Ergänzung durch weitere Tabellen, wie z.B Mitarbeiter </a:t>
-            </a:r>
-            <a:endParaRPr lang="de-DE" sz="1300" b="0" u="none" strike="noStrike">
+              <a:t>Ergänzung</a:t>
+            </a:r>
+            <a:r>
+              <a:rPr lang="en-US" sz="1300" b="0" u="none" strike="noStrike" dirty="0">
+                <a:solidFill>
+                  <a:srgbClr val="1A1A2E"/>
+                </a:solidFill>
+                <a:effectLst/>
+                <a:uFillTx/>
+                <a:latin typeface="Calibri"/>
+                <a:ea typeface="Calibri"/>
+              </a:rPr>
+              <a:t> </a:t>
+            </a:r>
+            <a:r>
+              <a:rPr lang="en-US" sz="1300" b="0" u="none" strike="noStrike" dirty="0" err="1">
+                <a:solidFill>
+                  <a:srgbClr val="1A1A2E"/>
+                </a:solidFill>
+                <a:effectLst/>
+                <a:uFillTx/>
+                <a:latin typeface="Calibri"/>
+                <a:ea typeface="Calibri"/>
+              </a:rPr>
+              <a:t>durch</a:t>
+            </a:r>
+            <a:r>
+              <a:rPr lang="en-US" sz="1300" b="0" u="none" strike="noStrike" dirty="0">
+                <a:solidFill>
+                  <a:srgbClr val="1A1A2E"/>
+                </a:solidFill>
+                <a:effectLst/>
+                <a:uFillTx/>
+                <a:latin typeface="Calibri"/>
+                <a:ea typeface="Calibri"/>
+              </a:rPr>
+              <a:t> </a:t>
+            </a:r>
+            <a:r>
+              <a:rPr lang="en-US" sz="1300" b="0" u="none" strike="noStrike" dirty="0" err="1">
+                <a:solidFill>
+                  <a:srgbClr val="1A1A2E"/>
+                </a:solidFill>
+                <a:effectLst/>
+                <a:uFillTx/>
+                <a:latin typeface="Calibri"/>
+                <a:ea typeface="Calibri"/>
+              </a:rPr>
+              <a:t>weitere</a:t>
+            </a:r>
+            <a:r>
+              <a:rPr lang="en-US" sz="1300" b="0" u="none" strike="noStrike" dirty="0">
+                <a:solidFill>
+                  <a:srgbClr val="1A1A2E"/>
+                </a:solidFill>
+                <a:effectLst/>
+                <a:uFillTx/>
+                <a:latin typeface="Calibri"/>
+                <a:ea typeface="Calibri"/>
+              </a:rPr>
+              <a:t> </a:t>
+            </a:r>
+            <a:r>
+              <a:rPr lang="en-US" sz="1300" b="0" u="none" strike="noStrike" dirty="0" err="1">
+                <a:solidFill>
+                  <a:srgbClr val="1A1A2E"/>
+                </a:solidFill>
+                <a:effectLst/>
+                <a:uFillTx/>
+                <a:latin typeface="Calibri"/>
+                <a:ea typeface="Calibri"/>
+              </a:rPr>
+              <a:t>Tabellen</a:t>
+            </a:r>
+            <a:r>
+              <a:rPr lang="en-US" sz="1300" b="0" u="none" strike="noStrike" dirty="0">
+                <a:solidFill>
+                  <a:srgbClr val="1A1A2E"/>
+                </a:solidFill>
+                <a:effectLst/>
+                <a:uFillTx/>
+                <a:latin typeface="Calibri"/>
+                <a:ea typeface="Calibri"/>
+              </a:rPr>
+              <a:t>, </a:t>
+            </a:r>
+            <a:r>
+              <a:rPr lang="en-US" sz="1300" b="0" u="none" strike="noStrike" dirty="0" err="1">
+                <a:solidFill>
+                  <a:srgbClr val="1A1A2E"/>
+                </a:solidFill>
+                <a:effectLst/>
+                <a:uFillTx/>
+                <a:latin typeface="Calibri"/>
+                <a:ea typeface="Calibri"/>
+              </a:rPr>
+              <a:t>wie</a:t>
+            </a:r>
+            <a:r>
+              <a:rPr lang="en-US" sz="1300" b="0" u="none" strike="noStrike" dirty="0">
+                <a:solidFill>
+                  <a:srgbClr val="1A1A2E"/>
+                </a:solidFill>
+                <a:effectLst/>
+                <a:uFillTx/>
+                <a:latin typeface="Calibri"/>
+                <a:ea typeface="Calibri"/>
+              </a:rPr>
+              <a:t> </a:t>
+            </a:r>
+            <a:r>
+              <a:rPr lang="en-US" sz="1300" b="0" u="none" strike="noStrike" dirty="0" err="1">
+                <a:solidFill>
+                  <a:srgbClr val="1A1A2E"/>
+                </a:solidFill>
+                <a:effectLst/>
+                <a:uFillTx/>
+                <a:latin typeface="Calibri"/>
+                <a:ea typeface="Calibri"/>
+              </a:rPr>
+              <a:t>z.B</a:t>
+            </a:r>
+            <a:r>
+              <a:rPr lang="en-US" sz="1300" b="0" u="none" strike="noStrike" dirty="0">
+                <a:solidFill>
+                  <a:srgbClr val="1A1A2E"/>
+                </a:solidFill>
+                <a:effectLst/>
+                <a:uFillTx/>
+                <a:latin typeface="Calibri"/>
+                <a:ea typeface="Calibri"/>
+              </a:rPr>
+              <a:t> Mitarbeiter </a:t>
+            </a:r>
+            <a:endParaRPr lang="de-DE" sz="1300" b="0" u="none" strike="noStrike" dirty="0">
               <a:solidFill>
                 <a:srgbClr val="000000"/>
               </a:solidFill>
@@ -10774,7 +11324,7 @@
               <a:buChar char=""/>
             </a:pPr>
             <a:r>
-              <a:rPr lang="en-US" sz="1300" b="0" u="none" strike="noStrike">
+              <a:rPr lang="en-US" sz="1300" b="0" u="none" strike="noStrike" dirty="0" err="1">
                 <a:solidFill>
                   <a:srgbClr val="1A1A2E"/>
                 </a:solidFill>
@@ -10783,9 +11333,33 @@
                 <a:latin typeface="Calibri"/>
                 <a:ea typeface="Calibri"/>
               </a:rPr>
-              <a:t>Erweiterung von Attributen</a:t>
-            </a:r>
-            <a:endParaRPr lang="de-DE" sz="1300" b="0" u="none" strike="noStrike">
+              <a:t>Erweiterung</a:t>
+            </a:r>
+            <a:r>
+              <a:rPr lang="en-US" sz="1300" b="0" u="none" strike="noStrike" dirty="0">
+                <a:solidFill>
+                  <a:srgbClr val="1A1A2E"/>
+                </a:solidFill>
+                <a:effectLst/>
+                <a:uFillTx/>
+                <a:latin typeface="Calibri"/>
+                <a:ea typeface="Calibri"/>
+              </a:rPr>
+              <a:t> von </a:t>
+            </a:r>
+            <a:r>
+              <a:rPr lang="en-US" sz="1300" b="0" u="none" strike="noStrike" dirty="0" err="1">
+                <a:solidFill>
+                  <a:srgbClr val="1A1A2E"/>
+                </a:solidFill>
+                <a:effectLst/>
+                <a:uFillTx/>
+                <a:latin typeface="Calibri"/>
+                <a:ea typeface="Calibri"/>
+              </a:rPr>
+              <a:t>Attributen</a:t>
+            </a:r>
+            <a:endParaRPr lang="de-DE" sz="1300" b="0" u="none" strike="noStrike" dirty="0">
               <a:solidFill>
                 <a:srgbClr val="000000"/>
               </a:solidFill>
@@ -10813,7 +11387,7 @@
               <a:buChar char=""/>
             </a:pPr>
             <a:r>
-              <a:rPr lang="en-US" sz="1300" b="0" u="none" strike="noStrike">
+              <a:rPr lang="en-US" sz="1300" b="0" u="none" strike="noStrike" dirty="0" err="1">
                 <a:solidFill>
                   <a:srgbClr val="1A1A2E"/>
                 </a:solidFill>
@@ -10822,9 +11396,97 @@
                 <a:latin typeface="Calibri"/>
                 <a:ea typeface="Calibri"/>
               </a:rPr>
-              <a:t>Authentifizierungen durch Benutzer Accounts</a:t>
-            </a:r>
-            <a:endParaRPr lang="de-DE" sz="1300" b="0" u="none" strike="noStrike">
+              <a:t>Authentifizierungen</a:t>
+            </a:r>
+            <a:r>
+              <a:rPr lang="en-US" sz="1300" b="0" u="none" strike="noStrike" dirty="0">
+                <a:solidFill>
+                  <a:srgbClr val="1A1A2E"/>
+                </a:solidFill>
+                <a:effectLst/>
+                <a:uFillTx/>
+                <a:latin typeface="Calibri"/>
+                <a:ea typeface="Calibri"/>
+              </a:rPr>
+              <a:t> </a:t>
+            </a:r>
+            <a:r>
+              <a:rPr lang="en-US" sz="1300" b="0" u="none" strike="noStrike" dirty="0" err="1">
+                <a:solidFill>
+                  <a:srgbClr val="1A1A2E"/>
+                </a:solidFill>
+                <a:effectLst/>
+                <a:uFillTx/>
+                <a:latin typeface="Calibri"/>
+                <a:ea typeface="Calibri"/>
+              </a:rPr>
+              <a:t>durch</a:t>
+            </a:r>
+            <a:r>
+              <a:rPr lang="en-US" sz="1300" b="0" u="none" strike="noStrike" dirty="0">
+                <a:solidFill>
+                  <a:srgbClr val="1A1A2E"/>
+                </a:solidFill>
+                <a:effectLst/>
+                <a:uFillTx/>
+                <a:latin typeface="Calibri"/>
+                <a:ea typeface="Calibri"/>
+              </a:rPr>
+              <a:t> </a:t>
+            </a:r>
+            <a:r>
+              <a:rPr lang="en-US" sz="1300" b="0" u="none" strike="noStrike" dirty="0" err="1">
+                <a:solidFill>
+                  <a:srgbClr val="1A1A2E"/>
+                </a:solidFill>
+                <a:effectLst/>
+                <a:uFillTx/>
+                <a:latin typeface="Calibri"/>
+                <a:ea typeface="Calibri"/>
+              </a:rPr>
+              <a:t>Benutzer</a:t>
+            </a:r>
+            <a:r>
+              <a:rPr lang="en-US" sz="1300" b="0" u="none" strike="noStrike" dirty="0">
+                <a:solidFill>
+                  <a:srgbClr val="1A1A2E"/>
+                </a:solidFill>
+                <a:effectLst/>
+                <a:uFillTx/>
+                <a:latin typeface="Calibri"/>
+                <a:ea typeface="Calibri"/>
+              </a:rPr>
+              <a:t> Accounts</a:t>
+            </a:r>
+          </a:p>
+          <a:p>
+            <a:pPr marL="343080" indent="-343080" defTabSz="914400">
+              <a:lnSpc>
+                <a:spcPct val="100000"/>
+              </a:lnSpc>
+              <a:spcBef>
+                <a:spcPts val="283"/>
+              </a:spcBef>
+              <a:spcAft>
+                <a:spcPts val="283"/>
+              </a:spcAft>
+              <a:buClr>
+                <a:srgbClr val="1A1A2E"/>
+              </a:buClr>
+              <a:buFont typeface="Symbol" charset="2"/>
+              <a:buChar char=""/>
+            </a:pPr>
+            <a:r>
+              <a:rPr lang="en-US" sz="1300" dirty="0" err="1">
+                <a:solidFill>
+                  <a:srgbClr val="1A1A2E"/>
+                </a:solidFill>
+                <a:latin typeface="Calibri"/>
+                <a:ea typeface="Calibri"/>
+              </a:rPr>
+              <a:t>Modularität</a:t>
+            </a:r>
+            <a:endParaRPr lang="de-DE" sz="1300" b="0" u="none" strike="noStrike" dirty="0">
               <a:solidFill>
                 <a:srgbClr val="000000"/>
               </a:solidFill>

--- a/GerMan_Präsi.pptx
+++ b/GerMan_Präsi.pptx
@@ -116,6 +116,11 @@
       </a:defRPr>
     </a:lvl9pPr>
   </p:defaultTextStyle>
+  <p:extLst>
+    <p:ext uri="{EFAFB233-063F-42B5-8137-9DF3F51BA10A}">
+      <p15:sldGuideLst xmlns:p15="http://schemas.microsoft.com/office/powerpoint/2012/main"/>
+    </p:ext>
+  </p:extLst>
 </p:presentation>
 </file>
 
@@ -1660,7 +1665,7 @@
         <p:spPr>
           <a:xfrm>
             <a:off x="685800" y="1143000"/>
-            <a:ext cx="5486040" cy="3085920"/>
+            <a:ext cx="5486400" cy="3086100"/>
           </a:xfrm>
           <a:prstGeom prst="rect">
             <a:avLst/>
@@ -1839,7 +1844,7 @@
         <p:spPr>
           <a:xfrm>
             <a:off x="685800" y="1143000"/>
-            <a:ext cx="5486040" cy="3085920"/>
+            <a:ext cx="5486400" cy="3086100"/>
           </a:xfrm>
           <a:prstGeom prst="rect">
             <a:avLst/>
@@ -9507,7 +9512,7 @@
               </a:tabLst>
             </a:pPr>
             <a:r>
-              <a:rPr lang="en-US" sz="1500" b="0" u="none" strike="noStrike">
+              <a:rPr lang="en-US" sz="1500" b="0" i="1" u="none" strike="noStrike" dirty="0">
                 <a:solidFill>
                   <a:srgbClr val="E8EEF7"/>
                 </a:solidFill>
@@ -9516,9 +9521,81 @@
                 <a:latin typeface="Calibri"/>
                 <a:ea typeface="Calibri"/>
               </a:rPr>
-              <a:t>Das gleiche mit dem Standort</a:t>
-            </a:r>
-            <a:endParaRPr lang="de-DE" sz="1500" b="0" u="none" strike="noStrike">
+              <a:t>(Das </a:t>
+            </a:r>
+            <a:r>
+              <a:rPr lang="en-US" sz="1500" b="0" i="1" u="none" strike="noStrike" dirty="0" err="1">
+                <a:solidFill>
+                  <a:srgbClr val="E8EEF7"/>
+                </a:solidFill>
+                <a:effectLst/>
+                <a:uFillTx/>
+                <a:latin typeface="Calibri"/>
+                <a:ea typeface="Calibri"/>
+              </a:rPr>
+              <a:t>gleiche</a:t>
+            </a:r>
+            <a:r>
+              <a:rPr lang="en-US" sz="1500" b="0" i="1" u="none" strike="noStrike" dirty="0">
+                <a:solidFill>
+                  <a:srgbClr val="E8EEF7"/>
+                </a:solidFill>
+                <a:effectLst/>
+                <a:uFillTx/>
+                <a:latin typeface="Calibri"/>
+                <a:ea typeface="Calibri"/>
+              </a:rPr>
+              <a:t> </a:t>
+            </a:r>
+            <a:r>
+              <a:rPr lang="en-US" sz="1500" b="0" i="1" u="none" strike="noStrike" dirty="0" err="1">
+                <a:solidFill>
+                  <a:srgbClr val="E8EEF7"/>
+                </a:solidFill>
+                <a:effectLst/>
+                <a:uFillTx/>
+                <a:latin typeface="Calibri"/>
+                <a:ea typeface="Calibri"/>
+              </a:rPr>
+              <a:t>mit</a:t>
+            </a:r>
+            <a:r>
+              <a:rPr lang="en-US" sz="1500" b="0" i="1" u="none" strike="noStrike" dirty="0">
+                <a:solidFill>
+                  <a:srgbClr val="E8EEF7"/>
+                </a:solidFill>
+                <a:effectLst/>
+                <a:uFillTx/>
+                <a:latin typeface="Calibri"/>
+                <a:ea typeface="Calibri"/>
+              </a:rPr>
+              <a:t> dem </a:t>
+            </a:r>
+            <a:r>
+              <a:rPr lang="en-US" sz="1500" b="0" i="1" u="none" strike="noStrike" dirty="0" err="1">
+                <a:solidFill>
+                  <a:srgbClr val="E8EEF7"/>
+                </a:solidFill>
+                <a:effectLst/>
+                <a:uFillTx/>
+                <a:latin typeface="Calibri"/>
+                <a:ea typeface="Calibri"/>
+              </a:rPr>
+              <a:t>Standort</a:t>
+            </a:r>
+            <a:r>
+              <a:rPr lang="en-US" sz="1500" b="0" i="1" u="none" strike="noStrike" dirty="0">
+                <a:solidFill>
+                  <a:srgbClr val="E8EEF7"/>
+                </a:solidFill>
+                <a:effectLst/>
+                <a:uFillTx/>
+                <a:latin typeface="Calibri"/>
+                <a:ea typeface="Calibri"/>
+              </a:rPr>
+              <a:t>)</a:t>
+            </a:r>
+            <a:endParaRPr lang="de-DE" sz="1500" b="0" i="1" u="none" strike="noStrike" dirty="0">
               <a:solidFill>
                 <a:srgbClr val="FFFFFF"/>
               </a:solidFill>
@@ -9851,7 +9928,7 @@
               <a:buChar char=""/>
             </a:pPr>
             <a:r>
-              <a:rPr lang="en-US" sz="1300" b="0" u="none" strike="noStrike">
+              <a:rPr lang="en-US" sz="1300" b="0" u="none" strike="noStrike" dirty="0">
                 <a:solidFill>
                   <a:srgbClr val="1A1A2E"/>
                 </a:solidFill>
@@ -9860,9 +9937,115 @@
                 <a:latin typeface="Calibri"/>
                 <a:ea typeface="Calibri"/>
               </a:rPr>
-              <a:t>Nur Exakte Suche, also keine Teilsuche.</a:t>
-            </a:r>
-            <a:endParaRPr lang="de-DE" sz="1300" b="0" u="none" strike="noStrike">
+              <a:t>Nur </a:t>
+            </a:r>
+            <a:r>
+              <a:rPr lang="en-US" sz="1300" dirty="0" err="1">
+                <a:solidFill>
+                  <a:srgbClr val="1A1A2E"/>
+                </a:solidFill>
+                <a:latin typeface="Calibri"/>
+                <a:ea typeface="Calibri"/>
+              </a:rPr>
+              <a:t>e</a:t>
+            </a:r>
+            <a:r>
+              <a:rPr lang="en-US" sz="1300" b="0" u="none" strike="noStrike" dirty="0" err="1">
+                <a:solidFill>
+                  <a:srgbClr val="1A1A2E"/>
+                </a:solidFill>
+                <a:effectLst/>
+                <a:uFillTx/>
+                <a:latin typeface="Calibri"/>
+                <a:ea typeface="Calibri"/>
+              </a:rPr>
+              <a:t>xakte</a:t>
+            </a:r>
+            <a:r>
+              <a:rPr lang="en-US" sz="1300" b="0" u="none" strike="noStrike" dirty="0">
+                <a:solidFill>
+                  <a:srgbClr val="1A1A2E"/>
+                </a:solidFill>
+                <a:effectLst/>
+                <a:uFillTx/>
+                <a:latin typeface="Calibri"/>
+                <a:ea typeface="Calibri"/>
+              </a:rPr>
+              <a:t> </a:t>
+            </a:r>
+            <a:r>
+              <a:rPr lang="en-US" sz="1300" b="0" u="none" strike="noStrike" dirty="0" err="1">
+                <a:solidFill>
+                  <a:srgbClr val="1A1A2E"/>
+                </a:solidFill>
+                <a:effectLst/>
+                <a:uFillTx/>
+                <a:latin typeface="Calibri"/>
+                <a:ea typeface="Calibri"/>
+              </a:rPr>
+              <a:t>Suche</a:t>
+            </a:r>
+            <a:r>
+              <a:rPr lang="en-US" sz="1300" b="0" u="none" strike="noStrike" dirty="0">
+                <a:solidFill>
+                  <a:srgbClr val="1A1A2E"/>
+                </a:solidFill>
+                <a:effectLst/>
+                <a:uFillTx/>
+                <a:latin typeface="Calibri"/>
+                <a:ea typeface="Calibri"/>
+              </a:rPr>
+              <a:t>, also </a:t>
+            </a:r>
+            <a:r>
+              <a:rPr lang="en-US" sz="1300" b="0" u="none" strike="noStrike" dirty="0" err="1">
+                <a:solidFill>
+                  <a:srgbClr val="1A1A2E"/>
+                </a:solidFill>
+                <a:effectLst/>
+                <a:uFillTx/>
+                <a:latin typeface="Calibri"/>
+                <a:ea typeface="Calibri"/>
+              </a:rPr>
+              <a:t>keine</a:t>
+            </a:r>
+            <a:r>
+              <a:rPr lang="en-US" sz="1300" b="0" u="none" strike="noStrike" dirty="0">
+                <a:solidFill>
+                  <a:srgbClr val="1A1A2E"/>
+                </a:solidFill>
+                <a:effectLst/>
+                <a:uFillTx/>
+                <a:latin typeface="Calibri"/>
+                <a:ea typeface="Calibri"/>
+              </a:rPr>
+              <a:t> </a:t>
+            </a:r>
+            <a:r>
+              <a:rPr lang="en-US" sz="1300" b="0" u="none" strike="noStrike" dirty="0" err="1">
+                <a:solidFill>
+                  <a:srgbClr val="1A1A2E"/>
+                </a:solidFill>
+                <a:effectLst/>
+                <a:uFillTx/>
+                <a:latin typeface="Calibri"/>
+                <a:ea typeface="Calibri"/>
+              </a:rPr>
+              <a:t>Teilsuche</a:t>
+            </a:r>
+            <a:r>
+              <a:rPr lang="en-US" sz="1300" b="0" u="none" strike="noStrike" dirty="0">
+                <a:solidFill>
+                  <a:srgbClr val="1A1A2E"/>
+                </a:solidFill>
+                <a:effectLst/>
+                <a:uFillTx/>
+                <a:latin typeface="Calibri"/>
+                <a:ea typeface="Calibri"/>
+              </a:rPr>
+              <a:t>.</a:t>
+            </a:r>
+            <a:endParaRPr lang="de-DE" sz="1300" b="0" u="none" strike="noStrike" dirty="0">
               <a:solidFill>
                 <a:srgbClr val="000000"/>
               </a:solidFill>
@@ -9883,7 +10066,7 @@
               <a:buChar char=""/>
             </a:pPr>
             <a:r>
-              <a:rPr lang="en-US" sz="1300" b="0" u="none" strike="noStrike">
+              <a:rPr lang="en-US" sz="1300" b="0" u="none" strike="noStrike" dirty="0" err="1">
                 <a:solidFill>
                   <a:srgbClr val="1A1A2E"/>
                 </a:solidFill>
@@ -9892,9 +10075,141 @@
                 <a:latin typeface="Calibri"/>
                 <a:ea typeface="Calibri"/>
               </a:rPr>
-              <a:t>Standort änderungen werden nicht direkt auf Geräte übertragen.</a:t>
-            </a:r>
-            <a:endParaRPr lang="de-DE" sz="1300" b="0" u="none" strike="noStrike">
+              <a:t>Standort</a:t>
+            </a:r>
+            <a:r>
+              <a:rPr lang="en-US" sz="1300" b="0" u="none" strike="noStrike" dirty="0">
+                <a:solidFill>
+                  <a:srgbClr val="1A1A2E"/>
+                </a:solidFill>
+                <a:effectLst/>
+                <a:uFillTx/>
+                <a:latin typeface="Calibri"/>
+                <a:ea typeface="Calibri"/>
+              </a:rPr>
+              <a:t> </a:t>
+            </a:r>
+            <a:r>
+              <a:rPr lang="en-US" sz="1300" b="0" u="none" strike="noStrike" dirty="0" err="1">
+                <a:solidFill>
+                  <a:srgbClr val="1A1A2E"/>
+                </a:solidFill>
+                <a:effectLst/>
+                <a:uFillTx/>
+                <a:latin typeface="Calibri"/>
+                <a:ea typeface="Calibri"/>
+              </a:rPr>
+              <a:t>Änderungen</a:t>
+            </a:r>
+            <a:r>
+              <a:rPr lang="en-US" sz="1300" b="0" u="none" strike="noStrike" dirty="0">
+                <a:solidFill>
+                  <a:srgbClr val="1A1A2E"/>
+                </a:solidFill>
+                <a:effectLst/>
+                <a:uFillTx/>
+                <a:latin typeface="Calibri"/>
+                <a:ea typeface="Calibri"/>
+              </a:rPr>
+              <a:t> </a:t>
+            </a:r>
+            <a:r>
+              <a:rPr lang="en-US" sz="1300" b="0" u="none" strike="noStrike" dirty="0" err="1">
+                <a:solidFill>
+                  <a:srgbClr val="1A1A2E"/>
+                </a:solidFill>
+                <a:effectLst/>
+                <a:uFillTx/>
+                <a:latin typeface="Calibri"/>
+                <a:ea typeface="Calibri"/>
+              </a:rPr>
+              <a:t>werden</a:t>
+            </a:r>
+            <a:r>
+              <a:rPr lang="en-US" sz="1300" b="0" u="none" strike="noStrike" dirty="0">
+                <a:solidFill>
+                  <a:srgbClr val="1A1A2E"/>
+                </a:solidFill>
+                <a:effectLst/>
+                <a:uFillTx/>
+                <a:latin typeface="Calibri"/>
+                <a:ea typeface="Calibri"/>
+              </a:rPr>
+              <a:t> nicht </a:t>
+            </a:r>
+            <a:r>
+              <a:rPr lang="en-US" sz="1300" b="0" u="none" strike="noStrike" dirty="0" err="1">
+                <a:solidFill>
+                  <a:srgbClr val="1A1A2E"/>
+                </a:solidFill>
+                <a:effectLst/>
+                <a:uFillTx/>
+                <a:latin typeface="Calibri"/>
+                <a:ea typeface="Calibri"/>
+              </a:rPr>
+              <a:t>direkt</a:t>
+            </a:r>
+            <a:r>
+              <a:rPr lang="en-US" sz="1300" b="0" u="none" strike="noStrike" dirty="0">
+                <a:solidFill>
+                  <a:srgbClr val="1A1A2E"/>
+                </a:solidFill>
+                <a:effectLst/>
+                <a:uFillTx/>
+                <a:latin typeface="Calibri"/>
+                <a:ea typeface="Calibri"/>
+              </a:rPr>
+              <a:t> auf </a:t>
+            </a:r>
+            <a:r>
+              <a:rPr lang="en-US" sz="1300" b="0" u="none" strike="noStrike" dirty="0" err="1">
+                <a:solidFill>
+                  <a:srgbClr val="1A1A2E"/>
+                </a:solidFill>
+                <a:effectLst/>
+                <a:uFillTx/>
+                <a:latin typeface="Calibri"/>
+                <a:ea typeface="Calibri"/>
+              </a:rPr>
+              <a:t>Geräte</a:t>
+            </a:r>
+            <a:r>
+              <a:rPr lang="en-US" sz="1300" b="0" u="none" strike="noStrike" dirty="0">
+                <a:solidFill>
+                  <a:srgbClr val="1A1A2E"/>
+                </a:solidFill>
+                <a:effectLst/>
+                <a:uFillTx/>
+                <a:latin typeface="Calibri"/>
+                <a:ea typeface="Calibri"/>
+              </a:rPr>
+              <a:t> </a:t>
+            </a:r>
+            <a:r>
+              <a:rPr lang="en-US" sz="1300" b="0" u="none" strike="noStrike" dirty="0" err="1">
+                <a:solidFill>
+                  <a:srgbClr val="1A1A2E"/>
+                </a:solidFill>
+                <a:effectLst/>
+                <a:uFillTx/>
+                <a:latin typeface="Calibri"/>
+                <a:ea typeface="Calibri"/>
+              </a:rPr>
+              <a:t>übertragen</a:t>
+            </a:r>
+            <a:r>
+              <a:rPr lang="en-US" sz="1300" b="0" u="none" strike="noStrike" dirty="0">
+                <a:solidFill>
+                  <a:srgbClr val="1A1A2E"/>
+                </a:solidFill>
+                <a:effectLst/>
+                <a:uFillTx/>
+                <a:latin typeface="Calibri"/>
+                <a:ea typeface="Calibri"/>
+              </a:rPr>
+              <a:t>.</a:t>
+            </a:r>
+            <a:endParaRPr lang="de-DE" sz="1300" b="0" u="none" strike="noStrike" dirty="0">
               <a:solidFill>
                 <a:srgbClr val="000000"/>
               </a:solidFill>
@@ -9915,7 +10230,7 @@
               <a:buChar char=""/>
             </a:pPr>
             <a:r>
-              <a:rPr lang="en-US" sz="1300" b="0" u="none" strike="noStrike">
+              <a:rPr lang="en-US" sz="1300" b="0" u="none" strike="noStrike" dirty="0">
                 <a:solidFill>
                   <a:srgbClr val="1A1A2E"/>
                 </a:solidFill>
@@ -9924,9 +10239,57 @@
                 <a:latin typeface="Calibri"/>
                 <a:ea typeface="Calibri"/>
               </a:rPr>
-              <a:t>Keine sortierte Anzeige.</a:t>
-            </a:r>
-            <a:endParaRPr lang="de-DE" sz="1300" b="0" u="none" strike="noStrike">
+              <a:t>Keine </a:t>
+            </a:r>
+            <a:r>
+              <a:rPr lang="en-US" sz="1300" b="0" u="none" strike="noStrike" dirty="0" err="1">
+                <a:solidFill>
+                  <a:srgbClr val="1A1A2E"/>
+                </a:solidFill>
+                <a:effectLst/>
+                <a:uFillTx/>
+                <a:latin typeface="Calibri"/>
+                <a:ea typeface="Calibri"/>
+              </a:rPr>
+              <a:t>sortierte</a:t>
+            </a:r>
+            <a:r>
+              <a:rPr lang="en-US" sz="1300" b="0" u="none" strike="noStrike" dirty="0">
+                <a:solidFill>
+                  <a:srgbClr val="1A1A2E"/>
+                </a:solidFill>
+                <a:effectLst/>
+                <a:uFillTx/>
+                <a:latin typeface="Calibri"/>
+                <a:ea typeface="Calibri"/>
+              </a:rPr>
+              <a:t> </a:t>
+            </a:r>
+            <a:r>
+              <a:rPr lang="en-US" sz="1300" b="0" u="none" strike="noStrike" dirty="0" err="1">
+                <a:solidFill>
+                  <a:srgbClr val="1A1A2E"/>
+                </a:solidFill>
+                <a:effectLst/>
+                <a:uFillTx/>
+                <a:latin typeface="Calibri"/>
+                <a:ea typeface="Calibri"/>
+              </a:rPr>
+              <a:t>Anzeige</a:t>
+            </a:r>
+            <a:r>
+              <a:rPr lang="en-US" sz="1300" b="0" u="none" strike="noStrike" dirty="0">
+                <a:solidFill>
+                  <a:srgbClr val="1A1A2E"/>
+                </a:solidFill>
+                <a:effectLst/>
+                <a:uFillTx/>
+                <a:latin typeface="Calibri"/>
+                <a:ea typeface="Calibri"/>
+              </a:rPr>
+              <a:t>.</a:t>
+            </a:r>
+            <a:endParaRPr lang="de-DE" sz="1300" b="0" u="none" strike="noStrike" dirty="0">
               <a:solidFill>
                 <a:srgbClr val="000000"/>
               </a:solidFill>
@@ -9947,7 +10310,7 @@
               <a:buChar char=""/>
             </a:pPr>
             <a:r>
-              <a:rPr lang="en-US" sz="1300" b="0" u="none" strike="noStrike">
+              <a:rPr lang="en-US" sz="1300" b="0" u="none" strike="noStrike" dirty="0">
                 <a:solidFill>
                   <a:srgbClr val="1A1A2E"/>
                 </a:solidFill>
@@ -9956,9 +10319,105 @@
                 <a:latin typeface="Calibri"/>
                 <a:ea typeface="Calibri"/>
               </a:rPr>
-              <a:t>Keine Authentifizierung z.B. durch Benutzer Accounts.</a:t>
-            </a:r>
-            <a:endParaRPr lang="de-DE" sz="1300" b="0" u="none" strike="noStrike">
+              <a:t>Keine </a:t>
+            </a:r>
+            <a:r>
+              <a:rPr lang="en-US" sz="1300" b="0" u="none" strike="noStrike" dirty="0" err="1">
+                <a:solidFill>
+                  <a:srgbClr val="1A1A2E"/>
+                </a:solidFill>
+                <a:effectLst/>
+                <a:uFillTx/>
+                <a:latin typeface="Calibri"/>
+                <a:ea typeface="Calibri"/>
+              </a:rPr>
+              <a:t>Authentifizierung</a:t>
+            </a:r>
+            <a:r>
+              <a:rPr lang="en-US" sz="1300" b="0" u="none" strike="noStrike" dirty="0">
+                <a:solidFill>
+                  <a:srgbClr val="1A1A2E"/>
+                </a:solidFill>
+                <a:effectLst/>
+                <a:uFillTx/>
+                <a:latin typeface="Calibri"/>
+                <a:ea typeface="Calibri"/>
+              </a:rPr>
+              <a:t> </a:t>
+            </a:r>
+            <a:r>
+              <a:rPr lang="en-US" sz="1300" b="0" u="none" strike="noStrike" dirty="0" err="1">
+                <a:solidFill>
+                  <a:srgbClr val="1A1A2E"/>
+                </a:solidFill>
+                <a:effectLst/>
+                <a:uFillTx/>
+                <a:latin typeface="Calibri"/>
+                <a:ea typeface="Calibri"/>
+              </a:rPr>
+              <a:t>z.B.</a:t>
+            </a:r>
+            <a:r>
+              <a:rPr lang="en-US" sz="1300" b="0" u="none" strike="noStrike" dirty="0">
+                <a:solidFill>
+                  <a:srgbClr val="1A1A2E"/>
+                </a:solidFill>
+                <a:effectLst/>
+                <a:uFillTx/>
+                <a:latin typeface="Calibri"/>
+                <a:ea typeface="Calibri"/>
+              </a:rPr>
+              <a:t> </a:t>
+            </a:r>
+            <a:r>
+              <a:rPr lang="en-US" sz="1300" b="0" u="none" strike="noStrike" dirty="0" err="1">
+                <a:solidFill>
+                  <a:srgbClr val="1A1A2E"/>
+                </a:solidFill>
+                <a:effectLst/>
+                <a:uFillTx/>
+                <a:latin typeface="Calibri"/>
+                <a:ea typeface="Calibri"/>
+              </a:rPr>
+              <a:t>durch</a:t>
+            </a:r>
+            <a:r>
+              <a:rPr lang="en-US" sz="1300" b="0" u="none" strike="noStrike" dirty="0">
+                <a:solidFill>
+                  <a:srgbClr val="1A1A2E"/>
+                </a:solidFill>
+                <a:effectLst/>
+                <a:uFillTx/>
+                <a:latin typeface="Calibri"/>
+                <a:ea typeface="Calibri"/>
+              </a:rPr>
+              <a:t> </a:t>
+            </a:r>
+            <a:r>
+              <a:rPr lang="en-US" sz="1300" b="0" u="none" strike="noStrike" dirty="0" err="1">
+                <a:solidFill>
+                  <a:srgbClr val="1A1A2E"/>
+                </a:solidFill>
+                <a:effectLst/>
+                <a:uFillTx/>
+                <a:latin typeface="Calibri"/>
+                <a:ea typeface="Calibri"/>
+              </a:rPr>
+              <a:t>Benutzer</a:t>
+            </a:r>
+            <a:r>
+              <a:rPr lang="en-US" sz="1300" b="0" u="none" strike="noStrike" dirty="0">
+                <a:solidFill>
+                  <a:srgbClr val="1A1A2E"/>
+                </a:solidFill>
+                <a:effectLst/>
+                <a:uFillTx/>
+                <a:latin typeface="Calibri"/>
+                <a:ea typeface="Calibri"/>
+              </a:rPr>
+              <a:t> Accounts.</a:t>
+            </a:r>
+            <a:endParaRPr lang="de-DE" sz="1300" b="0" u="none" strike="noStrike" dirty="0">
               <a:solidFill>
                 <a:srgbClr val="000000"/>
               </a:solidFill>
@@ -9979,7 +10438,7 @@
               <a:buChar char=""/>
             </a:pPr>
             <a:r>
-              <a:rPr lang="en-US" sz="1300" b="0" u="none" strike="noStrike">
+              <a:rPr lang="en-US" sz="1300" b="0" u="none" strike="noStrike" dirty="0">
                 <a:solidFill>
                   <a:srgbClr val="1A1A2E"/>
                 </a:solidFill>
@@ -9988,9 +10447,57 @@
                 <a:latin typeface="Calibri"/>
                 <a:ea typeface="Calibri"/>
               </a:rPr>
-              <a:t>match/case nur ab Python 3.10 verfügbar.</a:t>
-            </a:r>
-            <a:endParaRPr lang="de-DE" sz="1300" b="0" u="none" strike="noStrike">
+              <a:t>match/case </a:t>
+            </a:r>
+            <a:r>
+              <a:rPr lang="en-US" sz="1300" b="0" u="none" strike="noStrike" dirty="0" err="1">
+                <a:solidFill>
+                  <a:srgbClr val="1A1A2E"/>
+                </a:solidFill>
+                <a:effectLst/>
+                <a:uFillTx/>
+                <a:latin typeface="Calibri"/>
+                <a:ea typeface="Calibri"/>
+              </a:rPr>
+              <a:t>nur</a:t>
+            </a:r>
+            <a:r>
+              <a:rPr lang="en-US" sz="1300" b="0" u="none" strike="noStrike" dirty="0">
+                <a:solidFill>
+                  <a:srgbClr val="1A1A2E"/>
+                </a:solidFill>
+                <a:effectLst/>
+                <a:uFillTx/>
+                <a:latin typeface="Calibri"/>
+                <a:ea typeface="Calibri"/>
+              </a:rPr>
+              <a:t> ab Python 3.10 </a:t>
+            </a:r>
+            <a:r>
+              <a:rPr lang="en-US" sz="1300" b="0" u="none" strike="noStrike" dirty="0" err="1">
+                <a:solidFill>
+                  <a:srgbClr val="1A1A2E"/>
+                </a:solidFill>
+                <a:effectLst/>
+                <a:uFillTx/>
+                <a:latin typeface="Calibri"/>
+                <a:ea typeface="Calibri"/>
+              </a:rPr>
+              <a:t>verfügbar</a:t>
+            </a:r>
+            <a:r>
+              <a:rPr lang="en-US" sz="1300" b="0" u="none" strike="noStrike" dirty="0">
+                <a:solidFill>
+                  <a:srgbClr val="1A1A2E"/>
+                </a:solidFill>
+                <a:effectLst/>
+                <a:uFillTx/>
+                <a:latin typeface="Calibri"/>
+                <a:ea typeface="Calibri"/>
+              </a:rPr>
+              <a:t>.</a:t>
+            </a:r>
+            <a:endParaRPr lang="de-DE" sz="1300" b="0" u="none" strike="noStrike" dirty="0">
               <a:solidFill>
                 <a:srgbClr val="000000"/>
               </a:solidFill>
@@ -10172,7 +10679,7 @@
               <a:buChar char=""/>
             </a:pPr>
             <a:r>
-              <a:rPr lang="en-US" sz="1300" b="0" u="none" strike="noStrike">
+              <a:rPr lang="en-US" sz="1300" b="0" u="none" strike="noStrike" dirty="0" err="1">
                 <a:solidFill>
                   <a:srgbClr val="E8EEF7"/>
                 </a:solidFill>
@@ -10181,9 +10688,93 @@
                 <a:latin typeface="Calibri"/>
                 <a:ea typeface="Calibri"/>
               </a:rPr>
-              <a:t>Simpel gehaltener Code für einfache Wartung.</a:t>
-            </a:r>
-            <a:endParaRPr lang="de-DE" sz="1300" b="0" u="none" strike="noStrike">
+              <a:t>Simpel</a:t>
+            </a:r>
+            <a:r>
+              <a:rPr lang="en-US" sz="1300" b="0" u="none" strike="noStrike" dirty="0">
+                <a:solidFill>
+                  <a:srgbClr val="E8EEF7"/>
+                </a:solidFill>
+                <a:effectLst/>
+                <a:uFillTx/>
+                <a:latin typeface="Calibri"/>
+                <a:ea typeface="Calibri"/>
+              </a:rPr>
+              <a:t> </a:t>
+            </a:r>
+            <a:r>
+              <a:rPr lang="en-US" sz="1300" b="0" u="none" strike="noStrike" dirty="0" err="1">
+                <a:solidFill>
+                  <a:srgbClr val="E8EEF7"/>
+                </a:solidFill>
+                <a:effectLst/>
+                <a:uFillTx/>
+                <a:latin typeface="Calibri"/>
+                <a:ea typeface="Calibri"/>
+              </a:rPr>
+              <a:t>gehaltener</a:t>
+            </a:r>
+            <a:r>
+              <a:rPr lang="en-US" sz="1300" b="0" u="none" strike="noStrike" dirty="0">
+                <a:solidFill>
+                  <a:srgbClr val="E8EEF7"/>
+                </a:solidFill>
+                <a:effectLst/>
+                <a:uFillTx/>
+                <a:latin typeface="Calibri"/>
+                <a:ea typeface="Calibri"/>
+              </a:rPr>
+              <a:t> Code für </a:t>
+            </a:r>
+            <a:r>
+              <a:rPr lang="en-US" sz="1300" b="0" u="none" strike="noStrike" dirty="0" err="1">
+                <a:solidFill>
+                  <a:srgbClr val="E8EEF7"/>
+                </a:solidFill>
+                <a:effectLst/>
+                <a:uFillTx/>
+                <a:latin typeface="Calibri"/>
+                <a:ea typeface="Calibri"/>
+              </a:rPr>
+              <a:t>einfache</a:t>
+            </a:r>
+            <a:r>
+              <a:rPr lang="en-US" sz="1300" b="0" u="none" strike="noStrike" dirty="0">
+                <a:solidFill>
+                  <a:srgbClr val="E8EEF7"/>
+                </a:solidFill>
+                <a:effectLst/>
+                <a:uFillTx/>
+                <a:latin typeface="Calibri"/>
+                <a:ea typeface="Calibri"/>
+              </a:rPr>
+              <a:t> </a:t>
+            </a:r>
+            <a:r>
+              <a:rPr lang="en-US" sz="1300" b="0" u="none" strike="noStrike" dirty="0" err="1">
+                <a:solidFill>
+                  <a:srgbClr val="E8EEF7"/>
+                </a:solidFill>
+                <a:effectLst/>
+                <a:uFillTx/>
+                <a:latin typeface="Calibri"/>
+                <a:ea typeface="Calibri"/>
+              </a:rPr>
+              <a:t>Wartung</a:t>
+            </a:r>
+            <a:r>
+              <a:rPr lang="en-US" sz="1300" b="0" u="none" strike="noStrike" dirty="0">
+                <a:solidFill>
+                  <a:srgbClr val="E8EEF7"/>
+                </a:solidFill>
+                <a:effectLst/>
+                <a:uFillTx/>
+                <a:latin typeface="Calibri"/>
+                <a:ea typeface="Calibri"/>
+              </a:rPr>
+              <a:t>.</a:t>
+            </a:r>
+            <a:endParaRPr lang="de-DE" sz="1300" b="0" u="none" strike="noStrike" dirty="0">
               <a:solidFill>
                 <a:srgbClr val="000000"/>
               </a:solidFill>
@@ -10204,7 +10795,7 @@
               <a:buChar char=""/>
             </a:pPr>
             <a:r>
-              <a:rPr lang="en-US" sz="1300" b="0" u="none" strike="noStrike">
+              <a:rPr lang="en-US" sz="1300" b="0" u="none" strike="noStrike" dirty="0" err="1">
                 <a:solidFill>
                   <a:srgbClr val="E8EEF7"/>
                 </a:solidFill>
@@ -10213,9 +10804,93 @@
                 <a:latin typeface="Calibri"/>
                 <a:ea typeface="Calibri"/>
               </a:rPr>
-              <a:t>Erweiterbar durch weitere Tabellen und Attribute.</a:t>
-            </a:r>
-            <a:endParaRPr lang="de-DE" sz="1300" b="0" u="none" strike="noStrike">
+              <a:t>Erweiterbar</a:t>
+            </a:r>
+            <a:r>
+              <a:rPr lang="en-US" sz="1300" b="0" u="none" strike="noStrike" dirty="0">
+                <a:solidFill>
+                  <a:srgbClr val="E8EEF7"/>
+                </a:solidFill>
+                <a:effectLst/>
+                <a:uFillTx/>
+                <a:latin typeface="Calibri"/>
+                <a:ea typeface="Calibri"/>
+              </a:rPr>
+              <a:t> </a:t>
+            </a:r>
+            <a:r>
+              <a:rPr lang="en-US" sz="1300" b="0" u="none" strike="noStrike" dirty="0" err="1">
+                <a:solidFill>
+                  <a:srgbClr val="E8EEF7"/>
+                </a:solidFill>
+                <a:effectLst/>
+                <a:uFillTx/>
+                <a:latin typeface="Calibri"/>
+                <a:ea typeface="Calibri"/>
+              </a:rPr>
+              <a:t>durch</a:t>
+            </a:r>
+            <a:r>
+              <a:rPr lang="en-US" sz="1300" b="0" u="none" strike="noStrike" dirty="0">
+                <a:solidFill>
+                  <a:srgbClr val="E8EEF7"/>
+                </a:solidFill>
+                <a:effectLst/>
+                <a:uFillTx/>
+                <a:latin typeface="Calibri"/>
+                <a:ea typeface="Calibri"/>
+              </a:rPr>
+              <a:t> </a:t>
+            </a:r>
+            <a:r>
+              <a:rPr lang="en-US" sz="1300" b="0" u="none" strike="noStrike" dirty="0" err="1">
+                <a:solidFill>
+                  <a:srgbClr val="E8EEF7"/>
+                </a:solidFill>
+                <a:effectLst/>
+                <a:uFillTx/>
+                <a:latin typeface="Calibri"/>
+                <a:ea typeface="Calibri"/>
+              </a:rPr>
+              <a:t>weitere</a:t>
+            </a:r>
+            <a:r>
+              <a:rPr lang="en-US" sz="1300" b="0" u="none" strike="noStrike" dirty="0">
+                <a:solidFill>
+                  <a:srgbClr val="E8EEF7"/>
+                </a:solidFill>
+                <a:effectLst/>
+                <a:uFillTx/>
+                <a:latin typeface="Calibri"/>
+                <a:ea typeface="Calibri"/>
+              </a:rPr>
+              <a:t> </a:t>
+            </a:r>
+            <a:r>
+              <a:rPr lang="en-US" sz="1300" b="0" u="none" strike="noStrike" dirty="0" err="1">
+                <a:solidFill>
+                  <a:srgbClr val="E8EEF7"/>
+                </a:solidFill>
+                <a:effectLst/>
+                <a:uFillTx/>
+                <a:latin typeface="Calibri"/>
+                <a:ea typeface="Calibri"/>
+              </a:rPr>
+              <a:t>Tabellen</a:t>
+            </a:r>
+            <a:r>
+              <a:rPr lang="en-US" sz="1300" b="0" u="none" strike="noStrike" dirty="0">
+                <a:solidFill>
+                  <a:srgbClr val="E8EEF7"/>
+                </a:solidFill>
+                <a:effectLst/>
+                <a:uFillTx/>
+                <a:latin typeface="Calibri"/>
+                <a:ea typeface="Calibri"/>
+              </a:rPr>
+              <a:t> und Attribute.</a:t>
+            </a:r>
+            <a:endParaRPr lang="de-DE" sz="1300" b="0" u="none" strike="noStrike" dirty="0">
               <a:solidFill>
                 <a:srgbClr val="000000"/>
               </a:solidFill>
@@ -10236,7 +10911,7 @@
               <a:buChar char=""/>
             </a:pPr>
             <a:r>
-              <a:rPr lang="en-US" sz="1300" b="0" u="none" strike="noStrike">
+              <a:rPr lang="en-US" sz="1300" b="0" u="none" strike="noStrike" dirty="0" err="1">
                 <a:solidFill>
                   <a:srgbClr val="E8EEF7"/>
                 </a:solidFill>
@@ -10245,9 +10920,21 @@
                 <a:latin typeface="Calibri"/>
                 <a:ea typeface="Calibri"/>
               </a:rPr>
-              <a:t>Modularität.</a:t>
-            </a:r>
-            <a:endParaRPr lang="de-DE" sz="1300" b="0" u="none" strike="noStrike">
+              <a:t>Modularität</a:t>
+            </a:r>
+            <a:r>
+              <a:rPr lang="en-US" sz="1300" b="0" u="none" strike="noStrike" dirty="0">
+                <a:solidFill>
+                  <a:srgbClr val="E8EEF7"/>
+                </a:solidFill>
+                <a:effectLst/>
+                <a:uFillTx/>
+                <a:latin typeface="Calibri"/>
+                <a:ea typeface="Calibri"/>
+              </a:rPr>
+              <a:t>.</a:t>
+            </a:r>
+            <a:endParaRPr lang="de-DE" sz="1300" b="0" u="none" strike="noStrike" dirty="0">
               <a:solidFill>
                 <a:srgbClr val="000000"/>
               </a:solidFill>
@@ -10268,7 +10955,7 @@
               <a:buChar char=""/>
             </a:pPr>
             <a:r>
-              <a:rPr lang="en-US" sz="1300" b="0" u="none" strike="noStrike">
+              <a:rPr lang="en-US" sz="1300" b="0" u="none" strike="noStrike" dirty="0" err="1">
                 <a:solidFill>
                   <a:srgbClr val="E8EEF7"/>
                 </a:solidFill>
@@ -10277,9 +10964,45 @@
                 <a:latin typeface="Calibri"/>
                 <a:ea typeface="Calibri"/>
               </a:rPr>
-              <a:t>Eingabe validierungen.</a:t>
-            </a:r>
-            <a:endParaRPr lang="de-DE" sz="1300" b="0" u="none" strike="noStrike">
+              <a:t>Eingabe</a:t>
+            </a:r>
+            <a:r>
+              <a:rPr lang="en-US" sz="1300" b="0" u="none" strike="noStrike" dirty="0">
+                <a:solidFill>
+                  <a:srgbClr val="E8EEF7"/>
+                </a:solidFill>
+                <a:effectLst/>
+                <a:uFillTx/>
+                <a:latin typeface="Calibri"/>
+                <a:ea typeface="Calibri"/>
+              </a:rPr>
+              <a:t> </a:t>
+            </a:r>
+            <a:r>
+              <a:rPr lang="en-US" sz="1300" b="0" u="none" strike="noStrike" dirty="0" err="1">
+                <a:solidFill>
+                  <a:srgbClr val="E8EEF7"/>
+                </a:solidFill>
+                <a:effectLst/>
+                <a:uFillTx/>
+                <a:latin typeface="Calibri"/>
+                <a:ea typeface="Calibri"/>
+              </a:rPr>
+              <a:t>validierungen</a:t>
+            </a:r>
+            <a:r>
+              <a:rPr lang="en-US" sz="1300" b="0" u="none" strike="noStrike" dirty="0">
+                <a:solidFill>
+                  <a:srgbClr val="E8EEF7"/>
+                </a:solidFill>
+                <a:effectLst/>
+                <a:uFillTx/>
+                <a:latin typeface="Calibri"/>
+                <a:ea typeface="Calibri"/>
+              </a:rPr>
+              <a:t>.</a:t>
+            </a:r>
+            <a:endParaRPr lang="de-DE" sz="1300" b="0" u="none" strike="noStrike" dirty="0">
               <a:solidFill>
                 <a:srgbClr val="000000"/>
               </a:solidFill>

--- a/GerMan_Präsi.pptx
+++ b/GerMan_Präsi.pptx
@@ -10964,31 +10964,7 @@
                 <a:latin typeface="Calibri"/>
                 <a:ea typeface="Calibri"/>
               </a:rPr>
-              <a:t>Eingabe</a:t>
-            </a:r>
-            <a:r>
-              <a:rPr lang="en-US" sz="1300" b="0" u="none" strike="noStrike" dirty="0">
-                <a:solidFill>
-                  <a:srgbClr val="E8EEF7"/>
-                </a:solidFill>
-                <a:effectLst/>
-                <a:uFillTx/>
-                <a:latin typeface="Calibri"/>
-                <a:ea typeface="Calibri"/>
-              </a:rPr>
-              <a:t> </a:t>
-            </a:r>
-            <a:r>
-              <a:rPr lang="en-US" sz="1300" b="0" u="none" strike="noStrike" dirty="0" err="1">
-                <a:solidFill>
-                  <a:srgbClr val="E8EEF7"/>
-                </a:solidFill>
-                <a:effectLst/>
-                <a:uFillTx/>
-                <a:latin typeface="Calibri"/>
-                <a:ea typeface="Calibri"/>
-              </a:rPr>
-              <a:t>validierungen</a:t>
+              <a:t>Eingabevalidierungen</a:t>
             </a:r>
             <a:r>
               <a:rPr lang="en-US" sz="1300" b="0" u="none" strike="noStrike" dirty="0">
